--- a/06_social/fig/fig.pptx
+++ b/06_social/fig/fig.pptx
@@ -6,6 +6,7 @@
   </p:sldMasterIdLst>
   <p:sldIdLst>
     <p:sldId id="256" r:id="rId2"/>
+    <p:sldId id="257" r:id="rId3"/>
   </p:sldIdLst>
   <p:sldSz cx="9144000" cy="6858000" type="screen4x3"/>
   <p:notesSz cx="6858000" cy="9144000"/>
@@ -104,6 +105,11 @@
       </a:defRPr>
     </a:lvl9pPr>
   </p:defaultTextStyle>
+  <p:extLst>
+    <p:ext uri="{EFAFB233-063F-42B5-8137-9DF3F51BA10A}">
+      <p15:sldGuideLst xmlns:p15="http://schemas.microsoft.com/office/powerpoint/2012/main"/>
+    </p:ext>
+  </p:extLst>
 </p:presentation>
 </file>
 
@@ -757,10 +763,531 @@
           </a:p>
         </p:txBody>
       </p:sp>
+      <p:pic>
+        <p:nvPicPr>
+          <p:cNvPr id="2" name="図 1">
+            <a:extLst>
+              <a:ext uri="{FF2B5EF4-FFF2-40B4-BE49-F238E27FC236}">
+                <a16:creationId xmlns:a16="http://schemas.microsoft.com/office/drawing/2014/main" id="{653303C8-0757-892D-49E3-FE660B6108D7}"/>
+              </a:ext>
+            </a:extLst>
+          </p:cNvPr>
+          <p:cNvPicPr>
+            <a:picLocks noChangeAspect="1"/>
+          </p:cNvPicPr>
+          <p:nvPr/>
+        </p:nvPicPr>
+        <p:blipFill>
+          <a:blip r:embed="rId5"/>
+          <a:stretch>
+            <a:fillRect/>
+          </a:stretch>
+        </p:blipFill>
+        <p:spPr>
+          <a:xfrm>
+            <a:off x="5355361" y="691420"/>
+            <a:ext cx="3409343" cy="2579819"/>
+          </a:xfrm>
+          <a:prstGeom prst="rect">
+            <a:avLst/>
+          </a:prstGeom>
+        </p:spPr>
+      </p:pic>
+      <p:pic>
+        <p:nvPicPr>
+          <p:cNvPr id="3" name="図 2">
+            <a:extLst>
+              <a:ext uri="{FF2B5EF4-FFF2-40B4-BE49-F238E27FC236}">
+                <a16:creationId xmlns:a16="http://schemas.microsoft.com/office/drawing/2014/main" id="{12B9C64F-A835-BA2D-D002-4A6F758548BA}"/>
+              </a:ext>
+            </a:extLst>
+          </p:cNvPr>
+          <p:cNvPicPr>
+            <a:picLocks noChangeAspect="1"/>
+          </p:cNvPicPr>
+          <p:nvPr/>
+        </p:nvPicPr>
+        <p:blipFill>
+          <a:blip r:embed="rId6"/>
+          <a:stretch>
+            <a:fillRect/>
+          </a:stretch>
+        </p:blipFill>
+        <p:spPr>
+          <a:xfrm>
+            <a:off x="5350006" y="3925143"/>
+            <a:ext cx="3414698" cy="2583871"/>
+          </a:xfrm>
+          <a:prstGeom prst="rect">
+            <a:avLst/>
+          </a:prstGeom>
+        </p:spPr>
+      </p:pic>
     </p:spTree>
     <p:extLst>
       <p:ext uri="{BB962C8B-B14F-4D97-AF65-F5344CB8AC3E}">
         <p14:creationId xmlns:p14="http://schemas.microsoft.com/office/powerpoint/2010/main" val="180370560"/>
+      </p:ext>
+    </p:extLst>
+  </p:cSld>
+  <p:clrMapOvr>
+    <a:masterClrMapping/>
+  </p:clrMapOvr>
+</p:sld>
+</file>
+
+<file path=ppt/slides/slide2.xml><?xml version="1.0" encoding="utf-8"?>
+<p:sld xmlns:a="http://schemas.openxmlformats.org/drawingml/2006/main" xmlns:r="http://schemas.openxmlformats.org/officeDocument/2006/relationships" xmlns:p="http://schemas.openxmlformats.org/presentationml/2006/main">
+  <p:cSld>
+    <p:spTree>
+      <p:nvGrpSpPr>
+        <p:cNvPr id="1" name=""/>
+        <p:cNvGrpSpPr/>
+        <p:nvPr/>
+      </p:nvGrpSpPr>
+      <p:grpSpPr>
+        <a:xfrm>
+          <a:off x="0" y="0"/>
+          <a:ext cx="0" cy="0"/>
+          <a:chOff x="0" y="0"/>
+          <a:chExt cx="0" cy="0"/>
+        </a:xfrm>
+      </p:grpSpPr>
+      <p:pic>
+        <p:nvPicPr>
+          <p:cNvPr id="2" name="図 1">
+            <a:extLst>
+              <a:ext uri="{FF2B5EF4-FFF2-40B4-BE49-F238E27FC236}">
+                <a16:creationId xmlns:a16="http://schemas.microsoft.com/office/drawing/2014/main" id="{3DB1DDF9-83A5-E414-7405-FA732837CA0C}"/>
+              </a:ext>
+            </a:extLst>
+          </p:cNvPr>
+          <p:cNvPicPr>
+            <a:picLocks noChangeAspect="1"/>
+          </p:cNvPicPr>
+          <p:nvPr/>
+        </p:nvPicPr>
+        <p:blipFill>
+          <a:blip r:embed="rId2"/>
+          <a:stretch>
+            <a:fillRect/>
+          </a:stretch>
+        </p:blipFill>
+        <p:spPr>
+          <a:xfrm>
+            <a:off x="5355361" y="691420"/>
+            <a:ext cx="3409343" cy="2579819"/>
+          </a:xfrm>
+          <a:prstGeom prst="rect">
+            <a:avLst/>
+          </a:prstGeom>
+        </p:spPr>
+      </p:pic>
+      <p:pic>
+        <p:nvPicPr>
+          <p:cNvPr id="3" name="図 2">
+            <a:extLst>
+              <a:ext uri="{FF2B5EF4-FFF2-40B4-BE49-F238E27FC236}">
+                <a16:creationId xmlns:a16="http://schemas.microsoft.com/office/drawing/2014/main" id="{D25E86ED-6321-BF26-5C3D-2711B57425AC}"/>
+              </a:ext>
+            </a:extLst>
+          </p:cNvPr>
+          <p:cNvPicPr>
+            <a:picLocks noChangeAspect="1"/>
+          </p:cNvPicPr>
+          <p:nvPr/>
+        </p:nvPicPr>
+        <p:blipFill>
+          <a:blip r:embed="rId3"/>
+          <a:stretch>
+            <a:fillRect/>
+          </a:stretch>
+        </p:blipFill>
+        <p:spPr>
+          <a:xfrm>
+            <a:off x="5350006" y="3925143"/>
+            <a:ext cx="3414698" cy="2583871"/>
+          </a:xfrm>
+          <a:prstGeom prst="rect">
+            <a:avLst/>
+          </a:prstGeom>
+        </p:spPr>
+      </p:pic>
+      <p:sp>
+        <p:nvSpPr>
+          <p:cNvPr id="4" name="テキスト ボックス 3">
+            <a:extLst>
+              <a:ext uri="{FF2B5EF4-FFF2-40B4-BE49-F238E27FC236}">
+                <a16:creationId xmlns:a16="http://schemas.microsoft.com/office/drawing/2014/main" id="{608DF774-A156-582D-DCA7-32D9F586BC1C}"/>
+              </a:ext>
+            </a:extLst>
+          </p:cNvPr>
+          <p:cNvSpPr txBox="1"/>
+          <p:nvPr/>
+        </p:nvSpPr>
+        <p:spPr>
+          <a:xfrm>
+            <a:off x="6761467" y="322088"/>
+            <a:ext cx="877163" cy="369332"/>
+          </a:xfrm>
+          <a:prstGeom prst="rect">
+            <a:avLst/>
+          </a:prstGeom>
+          <a:noFill/>
+        </p:spPr>
+        <p:txBody>
+          <a:bodyPr wrap="none" rtlCol="0">
+            <a:spAutoFit/>
+          </a:bodyPr>
+          <a:lstStyle/>
+          <a:p>
+            <a:r>
+              <a:rPr kumimoji="1" lang="ja-JP" altLang="en-US"/>
+              <a:t>渋滞相</a:t>
+            </a:r>
+          </a:p>
+        </p:txBody>
+      </p:sp>
+      <p:sp>
+        <p:nvSpPr>
+          <p:cNvPr id="5" name="テキスト ボックス 4">
+            <a:extLst>
+              <a:ext uri="{FF2B5EF4-FFF2-40B4-BE49-F238E27FC236}">
+                <a16:creationId xmlns:a16="http://schemas.microsoft.com/office/drawing/2014/main" id="{2144890B-A9D3-704F-B3B1-FE71DE201B0B}"/>
+              </a:ext>
+            </a:extLst>
+          </p:cNvPr>
+          <p:cNvSpPr txBox="1"/>
+          <p:nvPr/>
+        </p:nvSpPr>
+        <p:spPr>
+          <a:xfrm>
+            <a:off x="6646050" y="3586762"/>
+            <a:ext cx="1107996" cy="369332"/>
+          </a:xfrm>
+          <a:prstGeom prst="rect">
+            <a:avLst/>
+          </a:prstGeom>
+          <a:noFill/>
+        </p:spPr>
+        <p:txBody>
+          <a:bodyPr wrap="none" rtlCol="0">
+            <a:spAutoFit/>
+          </a:bodyPr>
+          <a:lstStyle/>
+          <a:p>
+            <a:r>
+              <a:rPr kumimoji="1" lang="ja-JP" altLang="en-US"/>
+              <a:t>自由流相</a:t>
+            </a:r>
+          </a:p>
+        </p:txBody>
+      </p:sp>
+      <p:pic>
+        <p:nvPicPr>
+          <p:cNvPr id="6" name="図 5">
+            <a:extLst>
+              <a:ext uri="{FF2B5EF4-FFF2-40B4-BE49-F238E27FC236}">
+                <a16:creationId xmlns:a16="http://schemas.microsoft.com/office/drawing/2014/main" id="{B54AA4DB-A3F2-B895-0D61-731434FE4CF7}"/>
+              </a:ext>
+            </a:extLst>
+          </p:cNvPr>
+          <p:cNvPicPr>
+            <a:picLocks noChangeAspect="1"/>
+          </p:cNvPicPr>
+          <p:nvPr/>
+        </p:nvPicPr>
+        <p:blipFill>
+          <a:blip r:embed="rId4"/>
+          <a:stretch>
+            <a:fillRect/>
+          </a:stretch>
+        </p:blipFill>
+        <p:spPr>
+          <a:xfrm>
+            <a:off x="1065404" y="2189637"/>
+            <a:ext cx="2715142" cy="2778076"/>
+          </a:xfrm>
+          <a:prstGeom prst="rect">
+            <a:avLst/>
+          </a:prstGeom>
+        </p:spPr>
+      </p:pic>
+      <p:sp>
+        <p:nvSpPr>
+          <p:cNvPr id="7" name="右矢印 6">
+            <a:extLst>
+              <a:ext uri="{FF2B5EF4-FFF2-40B4-BE49-F238E27FC236}">
+                <a16:creationId xmlns:a16="http://schemas.microsoft.com/office/drawing/2014/main" id="{10379A92-48B1-A100-22CC-CCA33E70A3FF}"/>
+              </a:ext>
+            </a:extLst>
+          </p:cNvPr>
+          <p:cNvSpPr/>
+          <p:nvPr/>
+        </p:nvSpPr>
+        <p:spPr>
+          <a:xfrm rot="19456928">
+            <a:off x="4030343" y="2205836"/>
+            <a:ext cx="676177" cy="334929"/>
+          </a:xfrm>
+          <a:prstGeom prst="rightArrow">
+            <a:avLst/>
+          </a:prstGeom>
+        </p:spPr>
+        <p:style>
+          <a:lnRef idx="2">
+            <a:schemeClr val="accent1">
+              <a:shade val="15000"/>
+            </a:schemeClr>
+          </a:lnRef>
+          <a:fillRef idx="1">
+            <a:schemeClr val="accent1"/>
+          </a:fillRef>
+          <a:effectRef idx="0">
+            <a:schemeClr val="accent1"/>
+          </a:effectRef>
+          <a:fontRef idx="minor">
+            <a:schemeClr val="lt1"/>
+          </a:fontRef>
+        </p:style>
+        <p:txBody>
+          <a:bodyPr rtlCol="0" anchor="ctr"/>
+          <a:lstStyle/>
+          <a:p>
+            <a:pPr algn="ctr"/>
+            <a:endParaRPr kumimoji="1" lang="ja-JP" altLang="en-US"/>
+          </a:p>
+        </p:txBody>
+      </p:sp>
+      <p:sp>
+        <p:nvSpPr>
+          <p:cNvPr id="8" name="右矢印 7">
+            <a:extLst>
+              <a:ext uri="{FF2B5EF4-FFF2-40B4-BE49-F238E27FC236}">
+                <a16:creationId xmlns:a16="http://schemas.microsoft.com/office/drawing/2014/main" id="{863E1EE5-27D6-427F-B5EF-0BC2B12FE7F1}"/>
+              </a:ext>
+            </a:extLst>
+          </p:cNvPr>
+          <p:cNvSpPr/>
+          <p:nvPr/>
+        </p:nvSpPr>
+        <p:spPr>
+          <a:xfrm rot="1456928">
+            <a:off x="4126838" y="4433777"/>
+            <a:ext cx="676177" cy="334929"/>
+          </a:xfrm>
+          <a:prstGeom prst="rightArrow">
+            <a:avLst/>
+          </a:prstGeom>
+        </p:spPr>
+        <p:style>
+          <a:lnRef idx="2">
+            <a:schemeClr val="accent1">
+              <a:shade val="15000"/>
+            </a:schemeClr>
+          </a:lnRef>
+          <a:fillRef idx="1">
+            <a:schemeClr val="accent1"/>
+          </a:fillRef>
+          <a:effectRef idx="0">
+            <a:schemeClr val="accent1"/>
+          </a:effectRef>
+          <a:fontRef idx="minor">
+            <a:schemeClr val="lt1"/>
+          </a:fontRef>
+        </p:style>
+        <p:txBody>
+          <a:bodyPr rtlCol="0" anchor="ctr"/>
+          <a:lstStyle/>
+          <a:p>
+            <a:pPr algn="ctr"/>
+            <a:endParaRPr kumimoji="1" lang="ja-JP" altLang="en-US"/>
+          </a:p>
+        </p:txBody>
+      </p:sp>
+      <p:sp>
+        <p:nvSpPr>
+          <p:cNvPr id="9" name="テキスト ボックス 8">
+            <a:extLst>
+              <a:ext uri="{FF2B5EF4-FFF2-40B4-BE49-F238E27FC236}">
+                <a16:creationId xmlns:a16="http://schemas.microsoft.com/office/drawing/2014/main" id="{811FF9BB-49A9-A51E-4531-1E58957A99DF}"/>
+              </a:ext>
+            </a:extLst>
+          </p:cNvPr>
+          <p:cNvSpPr txBox="1"/>
+          <p:nvPr/>
+        </p:nvSpPr>
+        <p:spPr>
+          <a:xfrm>
+            <a:off x="1868977" y="1820305"/>
+            <a:ext cx="1107996" cy="369332"/>
+          </a:xfrm>
+          <a:prstGeom prst="rect">
+            <a:avLst/>
+          </a:prstGeom>
+          <a:noFill/>
+        </p:spPr>
+        <p:txBody>
+          <a:bodyPr wrap="none" rtlCol="0">
+            <a:spAutoFit/>
+          </a:bodyPr>
+          <a:lstStyle/>
+          <a:p>
+            <a:r>
+              <a:rPr kumimoji="1" lang="ja-JP" altLang="en-US"/>
+              <a:t>初期状態</a:t>
+            </a:r>
+          </a:p>
+        </p:txBody>
+      </p:sp>
+      <p:sp>
+        <p:nvSpPr>
+          <p:cNvPr id="10" name="テキスト ボックス 9">
+            <a:extLst>
+              <a:ext uri="{FF2B5EF4-FFF2-40B4-BE49-F238E27FC236}">
+                <a16:creationId xmlns:a16="http://schemas.microsoft.com/office/drawing/2014/main" id="{C28C1CF2-E65C-F110-021B-BBA06F13C233}"/>
+              </a:ext>
+            </a:extLst>
+          </p:cNvPr>
+          <p:cNvSpPr txBox="1"/>
+          <p:nvPr/>
+        </p:nvSpPr>
+        <p:spPr>
+          <a:xfrm>
+            <a:off x="3352768" y="1150332"/>
+            <a:ext cx="2031325" cy="646331"/>
+          </a:xfrm>
+          <a:prstGeom prst="rect">
+            <a:avLst/>
+          </a:prstGeom>
+          <a:noFill/>
+        </p:spPr>
+        <p:txBody>
+          <a:bodyPr wrap="none" rtlCol="0">
+            <a:spAutoFit/>
+          </a:bodyPr>
+          <a:lstStyle/>
+          <a:p>
+            <a:pPr algn="ctr"/>
+            <a:r>
+              <a:rPr kumimoji="1" lang="ja-JP" altLang="en-US"/>
+              <a:t>反射神経が小さい</a:t>
+            </a:r>
+            <a:endParaRPr kumimoji="1" lang="en-US" altLang="ja-JP" dirty="0"/>
+          </a:p>
+          <a:p>
+            <a:pPr algn="ctr"/>
+            <a:r>
+              <a:rPr kumimoji="1" lang="en-US" altLang="ja-JP" dirty="0"/>
+              <a:t>(a=1.0)</a:t>
+            </a:r>
+            <a:endParaRPr kumimoji="1" lang="ja-JP" altLang="en-US"/>
+          </a:p>
+        </p:txBody>
+      </p:sp>
+      <p:sp>
+        <p:nvSpPr>
+          <p:cNvPr id="11" name="テキスト ボックス 10">
+            <a:extLst>
+              <a:ext uri="{FF2B5EF4-FFF2-40B4-BE49-F238E27FC236}">
+                <a16:creationId xmlns:a16="http://schemas.microsoft.com/office/drawing/2014/main" id="{6D7C36EB-8F5D-3E1F-2641-E31A1CC1A953}"/>
+              </a:ext>
+            </a:extLst>
+          </p:cNvPr>
+          <p:cNvSpPr txBox="1"/>
+          <p:nvPr/>
+        </p:nvSpPr>
+        <p:spPr>
+          <a:xfrm>
+            <a:off x="3318681" y="4967713"/>
+            <a:ext cx="2031325" cy="646331"/>
+          </a:xfrm>
+          <a:prstGeom prst="rect">
+            <a:avLst/>
+          </a:prstGeom>
+          <a:noFill/>
+        </p:spPr>
+        <p:txBody>
+          <a:bodyPr wrap="none" rtlCol="0">
+            <a:spAutoFit/>
+          </a:bodyPr>
+          <a:lstStyle/>
+          <a:p>
+            <a:pPr algn="ctr"/>
+            <a:r>
+              <a:rPr kumimoji="1" lang="ja-JP" altLang="en-US"/>
+              <a:t>反射神経が大きい</a:t>
+            </a:r>
+            <a:endParaRPr kumimoji="1" lang="en-US" altLang="ja-JP" dirty="0"/>
+          </a:p>
+          <a:p>
+            <a:pPr algn="ctr"/>
+            <a:r>
+              <a:rPr kumimoji="1" lang="en-US" altLang="ja-JP" dirty="0"/>
+              <a:t>(a=3.0)</a:t>
+            </a:r>
+            <a:endParaRPr kumimoji="1" lang="ja-JP" altLang="en-US"/>
+          </a:p>
+        </p:txBody>
+      </p:sp>
+      <p:sp>
+        <p:nvSpPr>
+          <p:cNvPr id="12" name="円/楕円 11">
+            <a:extLst>
+              <a:ext uri="{FF2B5EF4-FFF2-40B4-BE49-F238E27FC236}">
+                <a16:creationId xmlns:a16="http://schemas.microsoft.com/office/drawing/2014/main" id="{2A3E8134-4E6C-87CA-63C6-A7D88987963C}"/>
+              </a:ext>
+            </a:extLst>
+          </p:cNvPr>
+          <p:cNvSpPr/>
+          <p:nvPr/>
+        </p:nvSpPr>
+        <p:spPr>
+          <a:xfrm>
+            <a:off x="1449540" y="2635148"/>
+            <a:ext cx="1903228" cy="1903228"/>
+          </a:xfrm>
+          <a:prstGeom prst="ellipse">
+            <a:avLst/>
+          </a:prstGeom>
+          <a:solidFill>
+            <a:schemeClr val="bg1"/>
+          </a:solidFill>
+          <a:ln>
+            <a:solidFill>
+              <a:schemeClr val="bg1"/>
+            </a:solidFill>
+          </a:ln>
+        </p:spPr>
+        <p:style>
+          <a:lnRef idx="2">
+            <a:schemeClr val="accent1">
+              <a:shade val="15000"/>
+            </a:schemeClr>
+          </a:lnRef>
+          <a:fillRef idx="1">
+            <a:schemeClr val="accent1"/>
+          </a:fillRef>
+          <a:effectRef idx="0">
+            <a:schemeClr val="accent1"/>
+          </a:effectRef>
+          <a:fontRef idx="minor">
+            <a:schemeClr val="lt1"/>
+          </a:fontRef>
+        </p:style>
+        <p:txBody>
+          <a:bodyPr rtlCol="0" anchor="ctr"/>
+          <a:lstStyle/>
+          <a:p>
+            <a:pPr algn="ctr"/>
+            <a:endParaRPr kumimoji="1" lang="ja-JP" altLang="en-US"/>
+          </a:p>
+        </p:txBody>
+      </p:sp>
+    </p:spTree>
+    <p:extLst>
+      <p:ext uri="{BB962C8B-B14F-4D97-AF65-F5344CB8AC3E}">
+        <p14:creationId xmlns:p14="http://schemas.microsoft.com/office/powerpoint/2010/main" val="3568578973"/>
       </p:ext>
     </p:extLst>
   </p:cSld>

--- a/06_social/fig/fig.pptx
+++ b/06_social/fig/fig.pptx
@@ -5,8 +5,9 @@
     <p:sldMasterId id="2147483660" r:id="rId1"/>
   </p:sldMasterIdLst>
   <p:sldIdLst>
-    <p:sldId id="256" r:id="rId2"/>
-    <p:sldId id="257" r:id="rId3"/>
+    <p:sldId id="258" r:id="rId2"/>
+    <p:sldId id="256" r:id="rId3"/>
+    <p:sldId id="257" r:id="rId4"/>
   </p:sldIdLst>
   <p:sldSz cx="9144000" cy="6858000" type="screen4x3"/>
   <p:notesSz cx="6858000" cy="9144000"/>
@@ -478,6 +479,380 @@
       </p:grpSpPr>
       <p:pic>
         <p:nvPicPr>
+          <p:cNvPr id="2" name="図 1" descr="男性の表情のイラスト「疑問」">
+            <a:extLst>
+              <a:ext uri="{FF2B5EF4-FFF2-40B4-BE49-F238E27FC236}">
+                <a16:creationId xmlns:a16="http://schemas.microsoft.com/office/drawing/2014/main" id="{9F73AB59-A488-E18D-FA8E-B85C05B6BD4A}"/>
+              </a:ext>
+            </a:extLst>
+          </p:cNvPr>
+          <p:cNvPicPr>
+            <a:picLocks noChangeAspect="1"/>
+          </p:cNvPicPr>
+          <p:nvPr/>
+        </p:nvPicPr>
+        <p:blipFill>
+          <a:blip r:embed="rId2"/>
+          <a:stretch>
+            <a:fillRect/>
+          </a:stretch>
+        </p:blipFill>
+        <p:spPr>
+          <a:xfrm>
+            <a:off x="5196219" y="940981"/>
+            <a:ext cx="1409700" cy="1905000"/>
+          </a:xfrm>
+          <a:prstGeom prst="rect">
+            <a:avLst/>
+          </a:prstGeom>
+        </p:spPr>
+      </p:pic>
+      <p:pic>
+        <p:nvPicPr>
+          <p:cNvPr id="3" name="図 2" descr="お店の建物のイラスト1">
+            <a:extLst>
+              <a:ext uri="{FF2B5EF4-FFF2-40B4-BE49-F238E27FC236}">
+                <a16:creationId xmlns:a16="http://schemas.microsoft.com/office/drawing/2014/main" id="{8B8F6241-495F-DF57-4AC0-4BDDD5B33FFE}"/>
+              </a:ext>
+            </a:extLst>
+          </p:cNvPr>
+          <p:cNvPicPr>
+            <a:picLocks noChangeAspect="1"/>
+          </p:cNvPicPr>
+          <p:nvPr/>
+        </p:nvPicPr>
+        <p:blipFill>
+          <a:blip r:embed="rId3"/>
+          <a:stretch>
+            <a:fillRect/>
+          </a:stretch>
+        </p:blipFill>
+        <p:spPr>
+          <a:xfrm>
+            <a:off x="1400514" y="4259817"/>
+            <a:ext cx="1270000" cy="1193800"/>
+          </a:xfrm>
+          <a:prstGeom prst="rect">
+            <a:avLst/>
+          </a:prstGeom>
+        </p:spPr>
+      </p:pic>
+      <p:pic>
+        <p:nvPicPr>
+          <p:cNvPr id="4" name="図 3" descr="お店の建物のイラスト6">
+            <a:extLst>
+              <a:ext uri="{FF2B5EF4-FFF2-40B4-BE49-F238E27FC236}">
+                <a16:creationId xmlns:a16="http://schemas.microsoft.com/office/drawing/2014/main" id="{8B14454F-A974-9EE7-D4FC-70E7577E5D00}"/>
+              </a:ext>
+            </a:extLst>
+          </p:cNvPr>
+          <p:cNvPicPr>
+            <a:picLocks noChangeAspect="1"/>
+          </p:cNvPicPr>
+          <p:nvPr/>
+        </p:nvPicPr>
+        <p:blipFill>
+          <a:blip r:embed="rId4"/>
+          <a:stretch>
+            <a:fillRect/>
+          </a:stretch>
+        </p:blipFill>
+        <p:spPr>
+          <a:xfrm>
+            <a:off x="5838488" y="4259817"/>
+            <a:ext cx="1270000" cy="1193800"/>
+          </a:xfrm>
+          <a:prstGeom prst="rect">
+            <a:avLst/>
+          </a:prstGeom>
+        </p:spPr>
+      </p:pic>
+      <p:pic>
+        <p:nvPicPr>
+          <p:cNvPr id="5" name="図 4" descr="会社の建物のアイコン（大企業）">
+            <a:extLst>
+              <a:ext uri="{FF2B5EF4-FFF2-40B4-BE49-F238E27FC236}">
+                <a16:creationId xmlns:a16="http://schemas.microsoft.com/office/drawing/2014/main" id="{C9EB71D8-057A-9E39-C60B-DEE4AD3C5E93}"/>
+              </a:ext>
+            </a:extLst>
+          </p:cNvPr>
+          <p:cNvPicPr>
+            <a:picLocks noChangeAspect="1"/>
+          </p:cNvPicPr>
+          <p:nvPr/>
+        </p:nvPicPr>
+        <p:blipFill>
+          <a:blip r:embed="rId5"/>
+          <a:stretch>
+            <a:fillRect/>
+          </a:stretch>
+        </p:blipFill>
+        <p:spPr>
+          <a:xfrm>
+            <a:off x="3340099" y="1467882"/>
+            <a:ext cx="1356592" cy="1193801"/>
+          </a:xfrm>
+          <a:prstGeom prst="rect">
+            <a:avLst/>
+          </a:prstGeom>
+        </p:spPr>
+      </p:pic>
+      <p:pic>
+        <p:nvPicPr>
+          <p:cNvPr id="8" name="図 7" descr="グラスに入ったビールのイラスト">
+            <a:extLst>
+              <a:ext uri="{FF2B5EF4-FFF2-40B4-BE49-F238E27FC236}">
+                <a16:creationId xmlns:a16="http://schemas.microsoft.com/office/drawing/2014/main" id="{8C4695BB-981D-4C69-6B97-DC898E83A349}"/>
+              </a:ext>
+            </a:extLst>
+          </p:cNvPr>
+          <p:cNvPicPr>
+            <a:picLocks noChangeAspect="1"/>
+          </p:cNvPicPr>
+          <p:nvPr/>
+        </p:nvPicPr>
+        <p:blipFill>
+          <a:blip r:embed="rId6"/>
+          <a:stretch>
+            <a:fillRect/>
+          </a:stretch>
+        </p:blipFill>
+        <p:spPr>
+          <a:xfrm>
+            <a:off x="2604629" y="4335278"/>
+            <a:ext cx="860374" cy="1042877"/>
+          </a:xfrm>
+          <a:prstGeom prst="rect">
+            <a:avLst/>
+          </a:prstGeom>
+        </p:spPr>
+      </p:pic>
+      <p:pic>
+        <p:nvPicPr>
+          <p:cNvPr id="9" name="図 8" descr="ビールのイラスト「ジョッキビール」">
+            <a:extLst>
+              <a:ext uri="{FF2B5EF4-FFF2-40B4-BE49-F238E27FC236}">
+                <a16:creationId xmlns:a16="http://schemas.microsoft.com/office/drawing/2014/main" id="{CA320A00-58F2-6A8B-4BEC-C0B788072BE6}"/>
+              </a:ext>
+            </a:extLst>
+          </p:cNvPr>
+          <p:cNvPicPr>
+            <a:picLocks noChangeAspect="1"/>
+          </p:cNvPicPr>
+          <p:nvPr/>
+        </p:nvPicPr>
+        <p:blipFill>
+          <a:blip r:embed="rId7"/>
+          <a:stretch>
+            <a:fillRect/>
+          </a:stretch>
+        </p:blipFill>
+        <p:spPr>
+          <a:xfrm>
+            <a:off x="4723693" y="4183617"/>
+            <a:ext cx="984250" cy="1270000"/>
+          </a:xfrm>
+          <a:prstGeom prst="rect">
+            <a:avLst/>
+          </a:prstGeom>
+        </p:spPr>
+      </p:pic>
+      <p:sp>
+        <p:nvSpPr>
+          <p:cNvPr id="10" name="テキスト ボックス 9">
+            <a:extLst>
+              <a:ext uri="{FF2B5EF4-FFF2-40B4-BE49-F238E27FC236}">
+                <a16:creationId xmlns:a16="http://schemas.microsoft.com/office/drawing/2014/main" id="{D75270D7-7A38-546C-9BBA-6819ADC16F16}"/>
+              </a:ext>
+            </a:extLst>
+          </p:cNvPr>
+          <p:cNvSpPr txBox="1"/>
+          <p:nvPr/>
+        </p:nvSpPr>
+        <p:spPr>
+          <a:xfrm>
+            <a:off x="1841379" y="5453617"/>
+            <a:ext cx="707245" cy="369332"/>
+          </a:xfrm>
+          <a:prstGeom prst="rect">
+            <a:avLst/>
+          </a:prstGeom>
+          <a:noFill/>
+        </p:spPr>
+        <p:txBody>
+          <a:bodyPr wrap="none" rtlCol="0">
+            <a:spAutoFit/>
+          </a:bodyPr>
+          <a:lstStyle/>
+          <a:p>
+            <a:r>
+              <a:rPr kumimoji="1" lang="en-US" altLang="ja-JP" dirty="0"/>
+              <a:t>Bar A</a:t>
+            </a:r>
+            <a:endParaRPr kumimoji="1" lang="ja-JP" altLang="en-US"/>
+          </a:p>
+        </p:txBody>
+      </p:sp>
+      <p:sp>
+        <p:nvSpPr>
+          <p:cNvPr id="11" name="テキスト ボックス 10">
+            <a:extLst>
+              <a:ext uri="{FF2B5EF4-FFF2-40B4-BE49-F238E27FC236}">
+                <a16:creationId xmlns:a16="http://schemas.microsoft.com/office/drawing/2014/main" id="{E8671FB5-2A53-4D6A-E239-46D19FF3E9E5}"/>
+              </a:ext>
+            </a:extLst>
+          </p:cNvPr>
+          <p:cNvSpPr txBox="1"/>
+          <p:nvPr/>
+        </p:nvSpPr>
+        <p:spPr>
+          <a:xfrm>
+            <a:off x="5562837" y="5453617"/>
+            <a:ext cx="710451" cy="369332"/>
+          </a:xfrm>
+          <a:prstGeom prst="rect">
+            <a:avLst/>
+          </a:prstGeom>
+          <a:noFill/>
+        </p:spPr>
+        <p:txBody>
+          <a:bodyPr wrap="none" rtlCol="0">
+            <a:spAutoFit/>
+          </a:bodyPr>
+          <a:lstStyle/>
+          <a:p>
+            <a:r>
+              <a:rPr kumimoji="1" lang="en-US" altLang="ja-JP" dirty="0"/>
+              <a:t>Bar B</a:t>
+            </a:r>
+            <a:endParaRPr kumimoji="1" lang="ja-JP" altLang="en-US"/>
+          </a:p>
+        </p:txBody>
+      </p:sp>
+      <p:sp>
+        <p:nvSpPr>
+          <p:cNvPr id="12" name="下矢印 11">
+            <a:extLst>
+              <a:ext uri="{FF2B5EF4-FFF2-40B4-BE49-F238E27FC236}">
+                <a16:creationId xmlns:a16="http://schemas.microsoft.com/office/drawing/2014/main" id="{27F195CD-99B3-2D34-DFF1-A5A73D0D531D}"/>
+              </a:ext>
+            </a:extLst>
+          </p:cNvPr>
+          <p:cNvSpPr/>
+          <p:nvPr/>
+        </p:nvSpPr>
+        <p:spPr>
+          <a:xfrm rot="2700000">
+            <a:off x="3065359" y="2889988"/>
+            <a:ext cx="549482" cy="1109331"/>
+          </a:xfrm>
+          <a:prstGeom prst="downArrow">
+            <a:avLst/>
+          </a:prstGeom>
+        </p:spPr>
+        <p:style>
+          <a:lnRef idx="2">
+            <a:schemeClr val="accent1">
+              <a:shade val="15000"/>
+            </a:schemeClr>
+          </a:lnRef>
+          <a:fillRef idx="1">
+            <a:schemeClr val="accent1"/>
+          </a:fillRef>
+          <a:effectRef idx="0">
+            <a:schemeClr val="accent1"/>
+          </a:effectRef>
+          <a:fontRef idx="minor">
+            <a:schemeClr val="lt1"/>
+          </a:fontRef>
+        </p:style>
+        <p:txBody>
+          <a:bodyPr rtlCol="0" anchor="ctr"/>
+          <a:lstStyle/>
+          <a:p>
+            <a:pPr algn="ctr"/>
+            <a:endParaRPr kumimoji="1" lang="ja-JP" altLang="en-US"/>
+          </a:p>
+        </p:txBody>
+      </p:sp>
+      <p:sp>
+        <p:nvSpPr>
+          <p:cNvPr id="13" name="下矢印 12">
+            <a:extLst>
+              <a:ext uri="{FF2B5EF4-FFF2-40B4-BE49-F238E27FC236}">
+                <a16:creationId xmlns:a16="http://schemas.microsoft.com/office/drawing/2014/main" id="{C4556082-C4FF-36B4-7730-0D49B50A9AEE}"/>
+              </a:ext>
+            </a:extLst>
+          </p:cNvPr>
+          <p:cNvSpPr/>
+          <p:nvPr/>
+        </p:nvSpPr>
+        <p:spPr>
+          <a:xfrm rot="18900000">
+            <a:off x="4421950" y="2889988"/>
+            <a:ext cx="549482" cy="1109331"/>
+          </a:xfrm>
+          <a:prstGeom prst="downArrow">
+            <a:avLst/>
+          </a:prstGeom>
+        </p:spPr>
+        <p:style>
+          <a:lnRef idx="2">
+            <a:schemeClr val="accent1">
+              <a:shade val="15000"/>
+            </a:schemeClr>
+          </a:lnRef>
+          <a:fillRef idx="1">
+            <a:schemeClr val="accent1"/>
+          </a:fillRef>
+          <a:effectRef idx="0">
+            <a:schemeClr val="accent1"/>
+          </a:effectRef>
+          <a:fontRef idx="minor">
+            <a:schemeClr val="lt1"/>
+          </a:fontRef>
+        </p:style>
+        <p:txBody>
+          <a:bodyPr rtlCol="0" anchor="ctr"/>
+          <a:lstStyle/>
+          <a:p>
+            <a:pPr algn="ctr"/>
+            <a:endParaRPr kumimoji="1" lang="ja-JP" altLang="en-US"/>
+          </a:p>
+        </p:txBody>
+      </p:sp>
+    </p:spTree>
+    <p:extLst>
+      <p:ext uri="{BB962C8B-B14F-4D97-AF65-F5344CB8AC3E}">
+        <p14:creationId xmlns:p14="http://schemas.microsoft.com/office/powerpoint/2010/main" val="580327406"/>
+      </p:ext>
+    </p:extLst>
+  </p:cSld>
+  <p:clrMapOvr>
+    <a:masterClrMapping/>
+  </p:clrMapOvr>
+</p:sld>
+</file>
+
+<file path=ppt/slides/slide2.xml><?xml version="1.0" encoding="utf-8"?>
+<p:sld xmlns:a="http://schemas.openxmlformats.org/drawingml/2006/main" xmlns:r="http://schemas.openxmlformats.org/officeDocument/2006/relationships" xmlns:p="http://schemas.openxmlformats.org/presentationml/2006/main">
+  <p:cSld>
+    <p:spTree>
+      <p:nvGrpSpPr>
+        <p:cNvPr id="1" name=""/>
+        <p:cNvGrpSpPr/>
+        <p:nvPr/>
+      </p:nvGrpSpPr>
+      <p:grpSpPr>
+        <a:xfrm>
+          <a:off x="0" y="0"/>
+          <a:ext cx="0" cy="0"/>
+          <a:chOff x="0" y="0"/>
+          <a:chExt cx="0" cy="0"/>
+        </a:xfrm>
+      </p:grpSpPr>
+      <p:pic>
+        <p:nvPicPr>
           <p:cNvPr id="4" name="図 3">
             <a:extLst>
               <a:ext uri="{FF2B5EF4-FFF2-40B4-BE49-F238E27FC236}">
@@ -836,7 +1211,7 @@
 </p:sld>
 </file>
 
-<file path=ppt/slides/slide2.xml><?xml version="1.0" encoding="utf-8"?>
+<file path=ppt/slides/slide3.xml><?xml version="1.0" encoding="utf-8"?>
 <p:sld xmlns:a="http://schemas.openxmlformats.org/drawingml/2006/main" xmlns:r="http://schemas.openxmlformats.org/officeDocument/2006/relationships" xmlns:p="http://schemas.openxmlformats.org/presentationml/2006/main">
   <p:cSld>
     <p:spTree>

--- a/06_social/fig/fig.pptx
+++ b/06_social/fig/fig.pptx
@@ -5,9 +5,10 @@
     <p:sldMasterId id="2147483660" r:id="rId1"/>
   </p:sldMasterIdLst>
   <p:sldIdLst>
-    <p:sldId id="258" r:id="rId2"/>
+    <p:sldId id="259" r:id="rId2"/>
     <p:sldId id="256" r:id="rId3"/>
     <p:sldId id="257" r:id="rId4"/>
+    <p:sldId id="258" r:id="rId5"/>
   </p:sldIdLst>
   <p:sldSz cx="9144000" cy="6858000" type="screen4x3"/>
   <p:notesSz cx="6858000" cy="9144000"/>
@@ -477,12 +478,66 @@
           <a:chExt cx="0" cy="0"/>
         </a:xfrm>
       </p:grpSpPr>
+      <p:sp>
+        <p:nvSpPr>
+          <p:cNvPr id="4" name="正方形/長方形 3">
+            <a:extLst>
+              <a:ext uri="{FF2B5EF4-FFF2-40B4-BE49-F238E27FC236}">
+                <a16:creationId xmlns:a16="http://schemas.microsoft.com/office/drawing/2014/main" id="{861BC732-C6E2-6F7E-BF81-F06B49C885FF}"/>
+              </a:ext>
+            </a:extLst>
+          </p:cNvPr>
+          <p:cNvSpPr/>
+          <p:nvPr/>
+        </p:nvSpPr>
+        <p:spPr>
+          <a:xfrm>
+            <a:off x="659219" y="1488558"/>
+            <a:ext cx="4550734" cy="303028"/>
+          </a:xfrm>
+          <a:prstGeom prst="rect">
+            <a:avLst/>
+          </a:prstGeom>
+          <a:solidFill>
+            <a:schemeClr val="bg2">
+              <a:lumMod val="90000"/>
+            </a:schemeClr>
+          </a:solidFill>
+          <a:ln>
+            <a:noFill/>
+          </a:ln>
+        </p:spPr>
+        <p:style>
+          <a:lnRef idx="2">
+            <a:schemeClr val="accent1">
+              <a:shade val="15000"/>
+            </a:schemeClr>
+          </a:lnRef>
+          <a:fillRef idx="1">
+            <a:schemeClr val="accent1"/>
+          </a:fillRef>
+          <a:effectRef idx="0">
+            <a:schemeClr val="accent1"/>
+          </a:effectRef>
+          <a:fontRef idx="minor">
+            <a:schemeClr val="lt1"/>
+          </a:fontRef>
+        </p:style>
+        <p:txBody>
+          <a:bodyPr rtlCol="0" anchor="ctr"/>
+          <a:lstStyle/>
+          <a:p>
+            <a:pPr algn="ctr"/>
+            <a:endParaRPr kumimoji="1" lang="ja-JP" altLang="en-US"/>
+          </a:p>
+        </p:txBody>
+      </p:sp>
       <p:pic>
         <p:nvPicPr>
-          <p:cNvPr id="2" name="図 1" descr="男性の表情のイラスト「疑問」">
-            <a:extLst>
-              <a:ext uri="{FF2B5EF4-FFF2-40B4-BE49-F238E27FC236}">
-                <a16:creationId xmlns:a16="http://schemas.microsoft.com/office/drawing/2014/main" id="{9F73AB59-A488-E18D-FA8E-B85C05B6BD4A}"/>
+          <p:cNvPr id="2" name="図 1" descr="車のキャラクターのイラスト（赤）">
+            <a:extLst>
+              <a:ext uri="{FF2B5EF4-FFF2-40B4-BE49-F238E27FC236}">
+                <a16:creationId xmlns:a16="http://schemas.microsoft.com/office/drawing/2014/main" id="{92A18894-160C-F4A5-75B6-1EADBFFEF7A4}"/>
               </a:ext>
             </a:extLst>
           </p:cNvPr>
@@ -498,9 +553,9 @@
           </a:stretch>
         </p:blipFill>
         <p:spPr>
-          <a:xfrm>
-            <a:off x="5196219" y="940981"/>
-            <a:ext cx="1409700" cy="1905000"/>
+          <a:xfrm flipH="1">
+            <a:off x="1005071" y="882502"/>
+            <a:ext cx="1262617" cy="909084"/>
           </a:xfrm>
           <a:prstGeom prst="rect">
             <a:avLst/>
@@ -509,10 +564,10 @@
       </p:pic>
       <p:pic>
         <p:nvPicPr>
-          <p:cNvPr id="3" name="図 2" descr="お店の建物のイラスト1">
-            <a:extLst>
-              <a:ext uri="{FF2B5EF4-FFF2-40B4-BE49-F238E27FC236}">
-                <a16:creationId xmlns:a16="http://schemas.microsoft.com/office/drawing/2014/main" id="{8B8F6241-495F-DF57-4AC0-4BDDD5B33FFE}"/>
+          <p:cNvPr id="3" name="図 2" descr="車のキャラクターのイラスト（青）">
+            <a:extLst>
+              <a:ext uri="{FF2B5EF4-FFF2-40B4-BE49-F238E27FC236}">
+                <a16:creationId xmlns:a16="http://schemas.microsoft.com/office/drawing/2014/main" id="{23EC3681-1F42-BEAA-BA6C-160434E47D02}"/>
               </a:ext>
             </a:extLst>
           </p:cNvPr>
@@ -528,225 +583,105 @@
           </a:stretch>
         </p:blipFill>
         <p:spPr>
-          <a:xfrm>
-            <a:off x="1400514" y="4259817"/>
-            <a:ext cx="1270000" cy="1193800"/>
+          <a:xfrm flipH="1">
+            <a:off x="3429294" y="882502"/>
+            <a:ext cx="1262617" cy="909084"/>
           </a:xfrm>
           <a:prstGeom prst="rect">
             <a:avLst/>
           </a:prstGeom>
         </p:spPr>
       </p:pic>
-      <p:pic>
-        <p:nvPicPr>
-          <p:cNvPr id="4" name="図 3" descr="お店の建物のイラスト6">
-            <a:extLst>
-              <a:ext uri="{FF2B5EF4-FFF2-40B4-BE49-F238E27FC236}">
-                <a16:creationId xmlns:a16="http://schemas.microsoft.com/office/drawing/2014/main" id="{8B14454F-A974-9EE7-D4FC-70E7577E5D00}"/>
-              </a:ext>
-            </a:extLst>
-          </p:cNvPr>
-          <p:cNvPicPr>
-            <a:picLocks noChangeAspect="1"/>
-          </p:cNvPicPr>
-          <p:nvPr/>
-        </p:nvPicPr>
-        <p:blipFill>
-          <a:blip r:embed="rId4"/>
-          <a:stretch>
-            <a:fillRect/>
-          </a:stretch>
-        </p:blipFill>
-        <p:spPr>
-          <a:xfrm>
-            <a:off x="5838488" y="4259817"/>
-            <a:ext cx="1270000" cy="1193800"/>
-          </a:xfrm>
-          <a:prstGeom prst="rect">
-            <a:avLst/>
-          </a:prstGeom>
-        </p:spPr>
-      </p:pic>
-      <p:pic>
-        <p:nvPicPr>
-          <p:cNvPr id="5" name="図 4" descr="会社の建物のアイコン（大企業）">
-            <a:extLst>
-              <a:ext uri="{FF2B5EF4-FFF2-40B4-BE49-F238E27FC236}">
-                <a16:creationId xmlns:a16="http://schemas.microsoft.com/office/drawing/2014/main" id="{C9EB71D8-057A-9E39-C60B-DEE4AD3C5E93}"/>
-              </a:ext>
-            </a:extLst>
-          </p:cNvPr>
-          <p:cNvPicPr>
-            <a:picLocks noChangeAspect="1"/>
-          </p:cNvPicPr>
-          <p:nvPr/>
-        </p:nvPicPr>
-        <p:blipFill>
-          <a:blip r:embed="rId5"/>
-          <a:stretch>
-            <a:fillRect/>
-          </a:stretch>
-        </p:blipFill>
-        <p:spPr>
-          <a:xfrm>
-            <a:off x="3340099" y="1467882"/>
-            <a:ext cx="1356592" cy="1193801"/>
-          </a:xfrm>
-          <a:prstGeom prst="rect">
-            <a:avLst/>
-          </a:prstGeom>
-        </p:spPr>
-      </p:pic>
-      <p:pic>
-        <p:nvPicPr>
-          <p:cNvPr id="8" name="図 7" descr="グラスに入ったビールのイラスト">
-            <a:extLst>
-              <a:ext uri="{FF2B5EF4-FFF2-40B4-BE49-F238E27FC236}">
-                <a16:creationId xmlns:a16="http://schemas.microsoft.com/office/drawing/2014/main" id="{8C4695BB-981D-4C69-6B97-DC898E83A349}"/>
-              </a:ext>
-            </a:extLst>
-          </p:cNvPr>
-          <p:cNvPicPr>
-            <a:picLocks noChangeAspect="1"/>
-          </p:cNvPicPr>
-          <p:nvPr/>
-        </p:nvPicPr>
-        <p:blipFill>
-          <a:blip r:embed="rId6"/>
-          <a:stretch>
-            <a:fillRect/>
-          </a:stretch>
-        </p:blipFill>
-        <p:spPr>
-          <a:xfrm>
-            <a:off x="2604629" y="4335278"/>
-            <a:ext cx="860374" cy="1042877"/>
-          </a:xfrm>
-          <a:prstGeom prst="rect">
-            <a:avLst/>
-          </a:prstGeom>
-        </p:spPr>
-      </p:pic>
-      <p:pic>
-        <p:nvPicPr>
-          <p:cNvPr id="9" name="図 8" descr="ビールのイラスト「ジョッキビール」">
-            <a:extLst>
-              <a:ext uri="{FF2B5EF4-FFF2-40B4-BE49-F238E27FC236}">
-                <a16:creationId xmlns:a16="http://schemas.microsoft.com/office/drawing/2014/main" id="{CA320A00-58F2-6A8B-4BEC-C0B788072BE6}"/>
-              </a:ext>
-            </a:extLst>
-          </p:cNvPr>
-          <p:cNvPicPr>
-            <a:picLocks noChangeAspect="1"/>
-          </p:cNvPicPr>
-          <p:nvPr/>
-        </p:nvPicPr>
-        <p:blipFill>
-          <a:blip r:embed="rId7"/>
-          <a:stretch>
-            <a:fillRect/>
-          </a:stretch>
-        </p:blipFill>
-        <p:spPr>
-          <a:xfrm>
-            <a:off x="4723693" y="4183617"/>
-            <a:ext cx="984250" cy="1270000"/>
-          </a:xfrm>
-          <a:prstGeom prst="rect">
-            <a:avLst/>
-          </a:prstGeom>
-        </p:spPr>
-      </p:pic>
+      <p:cxnSp>
+        <p:nvCxnSpPr>
+          <p:cNvPr id="6" name="直線コネクタ 5">
+            <a:extLst>
+              <a:ext uri="{FF2B5EF4-FFF2-40B4-BE49-F238E27FC236}">
+                <a16:creationId xmlns:a16="http://schemas.microsoft.com/office/drawing/2014/main" id="{42F1A9A7-909E-2916-0120-E88DABF7BDC3}"/>
+              </a:ext>
+            </a:extLst>
+          </p:cNvPr>
+          <p:cNvCxnSpPr/>
+          <p:nvPr/>
+        </p:nvCxnSpPr>
+        <p:spPr>
+          <a:xfrm>
+            <a:off x="2235789" y="738962"/>
+            <a:ext cx="0" cy="1212112"/>
+          </a:xfrm>
+          <a:prstGeom prst="line">
+            <a:avLst/>
+          </a:prstGeom>
+        </p:spPr>
+        <p:style>
+          <a:lnRef idx="2">
+            <a:schemeClr val="accent1"/>
+          </a:lnRef>
+          <a:fillRef idx="0">
+            <a:schemeClr val="accent1"/>
+          </a:fillRef>
+          <a:effectRef idx="1">
+            <a:schemeClr val="accent1"/>
+          </a:effectRef>
+          <a:fontRef idx="minor">
+            <a:schemeClr val="tx1"/>
+          </a:fontRef>
+        </p:style>
+      </p:cxnSp>
+      <p:cxnSp>
+        <p:nvCxnSpPr>
+          <p:cNvPr id="7" name="直線コネクタ 6">
+            <a:extLst>
+              <a:ext uri="{FF2B5EF4-FFF2-40B4-BE49-F238E27FC236}">
+                <a16:creationId xmlns:a16="http://schemas.microsoft.com/office/drawing/2014/main" id="{51744F04-82DC-142B-DBE4-48F6D17C1C33}"/>
+              </a:ext>
+            </a:extLst>
+          </p:cNvPr>
+          <p:cNvCxnSpPr/>
+          <p:nvPr/>
+        </p:nvCxnSpPr>
+        <p:spPr>
+          <a:xfrm>
+            <a:off x="4646431" y="738962"/>
+            <a:ext cx="0" cy="1212112"/>
+          </a:xfrm>
+          <a:prstGeom prst="line">
+            <a:avLst/>
+          </a:prstGeom>
+        </p:spPr>
+        <p:style>
+          <a:lnRef idx="2">
+            <a:schemeClr val="accent1"/>
+          </a:lnRef>
+          <a:fillRef idx="0">
+            <a:schemeClr val="accent1"/>
+          </a:fillRef>
+          <a:effectRef idx="1">
+            <a:schemeClr val="accent1"/>
+          </a:effectRef>
+          <a:fontRef idx="minor">
+            <a:schemeClr val="tx1"/>
+          </a:fontRef>
+        </p:style>
+      </p:cxnSp>
       <p:sp>
         <p:nvSpPr>
-          <p:cNvPr id="10" name="テキスト ボックス 9">
-            <a:extLst>
-              <a:ext uri="{FF2B5EF4-FFF2-40B4-BE49-F238E27FC236}">
-                <a16:creationId xmlns:a16="http://schemas.microsoft.com/office/drawing/2014/main" id="{D75270D7-7A38-546C-9BBA-6819ADC16F16}"/>
-              </a:ext>
-            </a:extLst>
-          </p:cNvPr>
-          <p:cNvSpPr txBox="1"/>
+          <p:cNvPr id="8" name="右矢印 7">
+            <a:extLst>
+              <a:ext uri="{FF2B5EF4-FFF2-40B4-BE49-F238E27FC236}">
+                <a16:creationId xmlns:a16="http://schemas.microsoft.com/office/drawing/2014/main" id="{EF8D8FC2-DBF9-DF6C-E9F9-8A9A181E3C06}"/>
+              </a:ext>
+            </a:extLst>
+          </p:cNvPr>
+          <p:cNvSpPr/>
           <p:nvPr/>
         </p:nvSpPr>
         <p:spPr>
           <a:xfrm>
-            <a:off x="1841379" y="5453617"/>
-            <a:ext cx="707245" cy="369332"/>
-          </a:xfrm>
-          <a:prstGeom prst="rect">
-            <a:avLst/>
-          </a:prstGeom>
-          <a:noFill/>
-        </p:spPr>
-        <p:txBody>
-          <a:bodyPr wrap="none" rtlCol="0">
-            <a:spAutoFit/>
-          </a:bodyPr>
-          <a:lstStyle/>
-          <a:p>
-            <a:r>
-              <a:rPr kumimoji="1" lang="en-US" altLang="ja-JP" dirty="0"/>
-              <a:t>Bar A</a:t>
-            </a:r>
-            <a:endParaRPr kumimoji="1" lang="ja-JP" altLang="en-US"/>
-          </a:p>
-        </p:txBody>
-      </p:sp>
-      <p:sp>
-        <p:nvSpPr>
-          <p:cNvPr id="11" name="テキスト ボックス 10">
-            <a:extLst>
-              <a:ext uri="{FF2B5EF4-FFF2-40B4-BE49-F238E27FC236}">
-                <a16:creationId xmlns:a16="http://schemas.microsoft.com/office/drawing/2014/main" id="{E8671FB5-2A53-4D6A-E239-46D19FF3E9E5}"/>
-              </a:ext>
-            </a:extLst>
-          </p:cNvPr>
-          <p:cNvSpPr txBox="1"/>
-          <p:nvPr/>
-        </p:nvSpPr>
-        <p:spPr>
-          <a:xfrm>
-            <a:off x="5562837" y="5453617"/>
-            <a:ext cx="710451" cy="369332"/>
-          </a:xfrm>
-          <a:prstGeom prst="rect">
-            <a:avLst/>
-          </a:prstGeom>
-          <a:noFill/>
-        </p:spPr>
-        <p:txBody>
-          <a:bodyPr wrap="none" rtlCol="0">
-            <a:spAutoFit/>
-          </a:bodyPr>
-          <a:lstStyle/>
-          <a:p>
-            <a:r>
-              <a:rPr kumimoji="1" lang="en-US" altLang="ja-JP" dirty="0"/>
-              <a:t>Bar B</a:t>
-            </a:r>
-            <a:endParaRPr kumimoji="1" lang="ja-JP" altLang="en-US"/>
-          </a:p>
-        </p:txBody>
-      </p:sp>
-      <p:sp>
-        <p:nvSpPr>
-          <p:cNvPr id="12" name="下矢印 11">
-            <a:extLst>
-              <a:ext uri="{FF2B5EF4-FFF2-40B4-BE49-F238E27FC236}">
-                <a16:creationId xmlns:a16="http://schemas.microsoft.com/office/drawing/2014/main" id="{27F195CD-99B3-2D34-DFF1-A5A73D0D531D}"/>
-              </a:ext>
-            </a:extLst>
-          </p:cNvPr>
-          <p:cNvSpPr/>
-          <p:nvPr/>
-        </p:nvSpPr>
-        <p:spPr>
-          <a:xfrm rot="2700000">
-            <a:off x="3065359" y="2889988"/>
-            <a:ext cx="549482" cy="1109331"/>
-          </a:xfrm>
-          <a:prstGeom prst="downArrow">
+            <a:off x="2360428" y="1148316"/>
+            <a:ext cx="308344" cy="340242"/>
+          </a:xfrm>
+          <a:prstGeom prst="rightArrow">
             <a:avLst/>
           </a:prstGeom>
         </p:spPr>
@@ -777,10 +712,10 @@
       </p:sp>
       <p:sp>
         <p:nvSpPr>
-          <p:cNvPr id="13" name="下矢印 12">
-            <a:extLst>
-              <a:ext uri="{FF2B5EF4-FFF2-40B4-BE49-F238E27FC236}">
-                <a16:creationId xmlns:a16="http://schemas.microsoft.com/office/drawing/2014/main" id="{C4556082-C4FF-36B4-7730-0D49B50A9AEE}"/>
+          <p:cNvPr id="9" name="右矢印 8">
+            <a:extLst>
+              <a:ext uri="{FF2B5EF4-FFF2-40B4-BE49-F238E27FC236}">
+                <a16:creationId xmlns:a16="http://schemas.microsoft.com/office/drawing/2014/main" id="{E41ED536-E6CE-CC5E-C401-4707D17F3017}"/>
               </a:ext>
             </a:extLst>
           </p:cNvPr>
@@ -788,11 +723,11 @@
           <p:nvPr/>
         </p:nvSpPr>
         <p:spPr>
-          <a:xfrm rot="18900000">
-            <a:off x="4421950" y="2889988"/>
-            <a:ext cx="549482" cy="1109331"/>
-          </a:xfrm>
-          <a:prstGeom prst="downArrow">
+          <a:xfrm>
+            <a:off x="4786127" y="1148316"/>
+            <a:ext cx="308344" cy="340242"/>
+          </a:xfrm>
+          <a:prstGeom prst="rightArrow">
             <a:avLst/>
           </a:prstGeom>
         </p:spPr>
@@ -821,10 +756,1020 @@
           </a:p>
         </p:txBody>
       </p:sp>
+      <mc:AlternateContent xmlns:mc="http://schemas.openxmlformats.org/markup-compatibility/2006">
+        <mc:Choice xmlns:a14="http://schemas.microsoft.com/office/drawing/2010/main" Requires="a14">
+          <p:sp>
+            <p:nvSpPr>
+              <p:cNvPr id="10" name="テキスト ボックス 9">
+                <a:extLst>
+                  <a:ext uri="{FF2B5EF4-FFF2-40B4-BE49-F238E27FC236}">
+                    <a16:creationId xmlns:a16="http://schemas.microsoft.com/office/drawing/2014/main" id="{A547782E-CF8D-D295-3DE5-FB611322ED41}"/>
+                  </a:ext>
+                </a:extLst>
+              </p:cNvPr>
+              <p:cNvSpPr txBox="1"/>
+              <p:nvPr/>
+            </p:nvSpPr>
+            <p:spPr>
+              <a:xfrm>
+                <a:off x="2114634" y="432724"/>
+                <a:ext cx="242309" cy="276999"/>
+              </a:xfrm>
+              <a:prstGeom prst="rect">
+                <a:avLst/>
+              </a:prstGeom>
+              <a:noFill/>
+            </p:spPr>
+            <p:txBody>
+              <a:bodyPr wrap="none" lIns="0" tIns="0" rIns="0" bIns="0" rtlCol="0">
+                <a:spAutoFit/>
+              </a:bodyPr>
+              <a:lstStyle/>
+              <a:p>
+                <a14:m>
+                  <m:oMathPara xmlns:m="http://schemas.openxmlformats.org/officeDocument/2006/math">
+                    <m:oMathParaPr>
+                      <m:jc m:val="centerGroup"/>
+                    </m:oMathParaPr>
+                    <m:oMath xmlns:m="http://schemas.openxmlformats.org/officeDocument/2006/math">
+                      <m:sSub>
+                        <m:sSubPr>
+                          <m:ctrlPr>
+                            <a:rPr kumimoji="1" lang="en-US" altLang="ja-JP" b="0" i="1" smtClean="0">
+                              <a:latin typeface="Cambria Math" panose="02040503050406030204" pitchFamily="18" charset="0"/>
+                            </a:rPr>
+                          </m:ctrlPr>
+                        </m:sSubPr>
+                        <m:e>
+                          <m:r>
+                            <a:rPr kumimoji="1" lang="en-US" altLang="ja-JP" b="0" i="1" smtClean="0">
+                              <a:latin typeface="Cambria Math" panose="02040503050406030204" pitchFamily="18" charset="0"/>
+                            </a:rPr>
+                            <m:t>𝑥</m:t>
+                          </m:r>
+                        </m:e>
+                        <m:sub>
+                          <m:r>
+                            <a:rPr kumimoji="1" lang="en-US" altLang="ja-JP" b="0" i="1" smtClean="0">
+                              <a:latin typeface="Cambria Math" panose="02040503050406030204" pitchFamily="18" charset="0"/>
+                            </a:rPr>
+                            <m:t>𝑖</m:t>
+                          </m:r>
+                        </m:sub>
+                      </m:sSub>
+                    </m:oMath>
+                  </m:oMathPara>
+                </a14:m>
+                <a:endParaRPr kumimoji="1" lang="ja-JP" altLang="en-US"/>
+              </a:p>
+            </p:txBody>
+          </p:sp>
+        </mc:Choice>
+        <mc:Fallback>
+          <p:sp>
+            <p:nvSpPr>
+              <p:cNvPr id="10" name="テキスト ボックス 9">
+                <a:extLst>
+                  <a:ext uri="{FF2B5EF4-FFF2-40B4-BE49-F238E27FC236}">
+                    <a16:creationId xmlns:a16="http://schemas.microsoft.com/office/drawing/2014/main" id="{A547782E-CF8D-D295-3DE5-FB611322ED41}"/>
+                  </a:ext>
+                </a:extLst>
+              </p:cNvPr>
+              <p:cNvSpPr txBox="1">
+                <a:spLocks noRot="1" noChangeAspect="1" noMove="1" noResize="1" noEditPoints="1" noAdjustHandles="1" noChangeArrowheads="1" noChangeShapeType="1" noTextEdit="1"/>
+              </p:cNvSpPr>
+              <p:nvPr/>
+            </p:nvSpPr>
+            <p:spPr>
+              <a:xfrm>
+                <a:off x="2114634" y="432724"/>
+                <a:ext cx="242309" cy="276999"/>
+              </a:xfrm>
+              <a:prstGeom prst="rect">
+                <a:avLst/>
+              </a:prstGeom>
+              <a:blipFill>
+                <a:blip r:embed="rId4"/>
+                <a:stretch>
+                  <a:fillRect l="-15000" r="-10000" b="-18182"/>
+                </a:stretch>
+              </a:blipFill>
+            </p:spPr>
+            <p:txBody>
+              <a:bodyPr/>
+              <a:lstStyle/>
+              <a:p>
+                <a:r>
+                  <a:rPr lang="ja-JP" altLang="en-US">
+                    <a:noFill/>
+                  </a:rPr>
+                  <a:t> </a:t>
+                </a:r>
+              </a:p>
+            </p:txBody>
+          </p:sp>
+        </mc:Fallback>
+      </mc:AlternateContent>
+      <mc:AlternateContent xmlns:mc="http://schemas.openxmlformats.org/markup-compatibility/2006">
+        <mc:Choice xmlns:a14="http://schemas.microsoft.com/office/drawing/2010/main" Requires="a14">
+          <p:sp>
+            <p:nvSpPr>
+              <p:cNvPr id="11" name="テキスト ボックス 10">
+                <a:extLst>
+                  <a:ext uri="{FF2B5EF4-FFF2-40B4-BE49-F238E27FC236}">
+                    <a16:creationId xmlns:a16="http://schemas.microsoft.com/office/drawing/2014/main" id="{DB728771-CCFD-13D9-9614-8F34CBC896E2}"/>
+                  </a:ext>
+                </a:extLst>
+              </p:cNvPr>
+              <p:cNvSpPr txBox="1"/>
+              <p:nvPr/>
+            </p:nvSpPr>
+            <p:spPr>
+              <a:xfrm>
+                <a:off x="4437489" y="432724"/>
+                <a:ext cx="461921" cy="276999"/>
+              </a:xfrm>
+              <a:prstGeom prst="rect">
+                <a:avLst/>
+              </a:prstGeom>
+              <a:noFill/>
+            </p:spPr>
+            <p:txBody>
+              <a:bodyPr wrap="none" lIns="0" tIns="0" rIns="0" bIns="0" rtlCol="0">
+                <a:spAutoFit/>
+              </a:bodyPr>
+              <a:lstStyle/>
+              <a:p>
+                <a14:m>
+                  <m:oMathPara xmlns:m="http://schemas.openxmlformats.org/officeDocument/2006/math">
+                    <m:oMathParaPr>
+                      <m:jc m:val="centerGroup"/>
+                    </m:oMathParaPr>
+                    <m:oMath xmlns:m="http://schemas.openxmlformats.org/officeDocument/2006/math">
+                      <m:sSub>
+                        <m:sSubPr>
+                          <m:ctrlPr>
+                            <a:rPr kumimoji="1" lang="en-US" altLang="ja-JP" b="0" i="1" smtClean="0">
+                              <a:latin typeface="Cambria Math" panose="02040503050406030204" pitchFamily="18" charset="0"/>
+                            </a:rPr>
+                          </m:ctrlPr>
+                        </m:sSubPr>
+                        <m:e>
+                          <m:r>
+                            <a:rPr kumimoji="1" lang="en-US" altLang="ja-JP" b="0" i="1" smtClean="0">
+                              <a:latin typeface="Cambria Math" panose="02040503050406030204" pitchFamily="18" charset="0"/>
+                            </a:rPr>
+                            <m:t>𝑥</m:t>
+                          </m:r>
+                        </m:e>
+                        <m:sub>
+                          <m:r>
+                            <a:rPr kumimoji="1" lang="en-US" altLang="ja-JP" b="0" i="1" smtClean="0">
+                              <a:latin typeface="Cambria Math" panose="02040503050406030204" pitchFamily="18" charset="0"/>
+                            </a:rPr>
+                            <m:t>𝑖</m:t>
+                          </m:r>
+                          <m:r>
+                            <a:rPr kumimoji="1" lang="en-US" altLang="ja-JP" b="0" i="1" smtClean="0">
+                              <a:latin typeface="Cambria Math" panose="02040503050406030204" pitchFamily="18" charset="0"/>
+                            </a:rPr>
+                            <m:t>+1</m:t>
+                          </m:r>
+                        </m:sub>
+                      </m:sSub>
+                    </m:oMath>
+                  </m:oMathPara>
+                </a14:m>
+                <a:endParaRPr kumimoji="1" lang="ja-JP" altLang="en-US"/>
+              </a:p>
+            </p:txBody>
+          </p:sp>
+        </mc:Choice>
+        <mc:Fallback>
+          <p:sp>
+            <p:nvSpPr>
+              <p:cNvPr id="11" name="テキスト ボックス 10">
+                <a:extLst>
+                  <a:ext uri="{FF2B5EF4-FFF2-40B4-BE49-F238E27FC236}">
+                    <a16:creationId xmlns:a16="http://schemas.microsoft.com/office/drawing/2014/main" id="{DB728771-CCFD-13D9-9614-8F34CBC896E2}"/>
+                  </a:ext>
+                </a:extLst>
+              </p:cNvPr>
+              <p:cNvSpPr txBox="1">
+                <a:spLocks noRot="1" noChangeAspect="1" noMove="1" noResize="1" noEditPoints="1" noAdjustHandles="1" noChangeArrowheads="1" noChangeShapeType="1" noTextEdit="1"/>
+              </p:cNvSpPr>
+              <p:nvPr/>
+            </p:nvSpPr>
+            <p:spPr>
+              <a:xfrm>
+                <a:off x="4437489" y="432724"/>
+                <a:ext cx="461921" cy="276999"/>
+              </a:xfrm>
+              <a:prstGeom prst="rect">
+                <a:avLst/>
+              </a:prstGeom>
+              <a:blipFill>
+                <a:blip r:embed="rId5"/>
+                <a:stretch>
+                  <a:fillRect l="-8108" r="-5405" b="-18182"/>
+                </a:stretch>
+              </a:blipFill>
+            </p:spPr>
+            <p:txBody>
+              <a:bodyPr/>
+              <a:lstStyle/>
+              <a:p>
+                <a:r>
+                  <a:rPr lang="ja-JP" altLang="en-US">
+                    <a:noFill/>
+                  </a:rPr>
+                  <a:t> </a:t>
+                </a:r>
+              </a:p>
+            </p:txBody>
+          </p:sp>
+        </mc:Fallback>
+      </mc:AlternateContent>
+      <p:cxnSp>
+        <p:nvCxnSpPr>
+          <p:cNvPr id="13" name="直線矢印コネクタ 12">
+            <a:extLst>
+              <a:ext uri="{FF2B5EF4-FFF2-40B4-BE49-F238E27FC236}">
+                <a16:creationId xmlns:a16="http://schemas.microsoft.com/office/drawing/2014/main" id="{DD6A9ED7-CA2B-EA9C-E580-C15536A7DF3B}"/>
+              </a:ext>
+            </a:extLst>
+          </p:cNvPr>
+          <p:cNvCxnSpPr/>
+          <p:nvPr/>
+        </p:nvCxnSpPr>
+        <p:spPr>
+          <a:xfrm>
+            <a:off x="2267688" y="1951074"/>
+            <a:ext cx="2304312" cy="0"/>
+          </a:xfrm>
+          <a:prstGeom prst="straightConnector1">
+            <a:avLst/>
+          </a:prstGeom>
+          <a:ln>
+            <a:headEnd type="triangle"/>
+            <a:tailEnd type="triangle"/>
+          </a:ln>
+        </p:spPr>
+        <p:style>
+          <a:lnRef idx="2">
+            <a:schemeClr val="accent1"/>
+          </a:lnRef>
+          <a:fillRef idx="0">
+            <a:schemeClr val="accent1"/>
+          </a:fillRef>
+          <a:effectRef idx="1">
+            <a:schemeClr val="accent1"/>
+          </a:effectRef>
+          <a:fontRef idx="minor">
+            <a:schemeClr val="tx1"/>
+          </a:fontRef>
+        </p:style>
+      </p:cxnSp>
+      <mc:AlternateContent xmlns:mc="http://schemas.openxmlformats.org/markup-compatibility/2006">
+        <mc:Choice xmlns:a14="http://schemas.microsoft.com/office/drawing/2010/main" Requires="a14">
+          <p:sp>
+            <p:nvSpPr>
+              <p:cNvPr id="14" name="テキスト ボックス 13">
+                <a:extLst>
+                  <a:ext uri="{FF2B5EF4-FFF2-40B4-BE49-F238E27FC236}">
+                    <a16:creationId xmlns:a16="http://schemas.microsoft.com/office/drawing/2014/main" id="{727B2896-D05B-832D-7B23-70492EF0ED89}"/>
+                  </a:ext>
+                </a:extLst>
+              </p:cNvPr>
+              <p:cNvSpPr txBox="1"/>
+              <p:nvPr/>
+            </p:nvSpPr>
+            <p:spPr>
+              <a:xfrm>
+                <a:off x="3239209" y="1993328"/>
+                <a:ext cx="380169" cy="276999"/>
+              </a:xfrm>
+              <a:prstGeom prst="rect">
+                <a:avLst/>
+              </a:prstGeom>
+              <a:noFill/>
+            </p:spPr>
+            <p:txBody>
+              <a:bodyPr wrap="none" lIns="0" tIns="0" rIns="0" bIns="0" rtlCol="0">
+                <a:spAutoFit/>
+              </a:bodyPr>
+              <a:lstStyle/>
+              <a:p>
+                <a14:m>
+                  <m:oMathPara xmlns:m="http://schemas.openxmlformats.org/officeDocument/2006/math">
+                    <m:oMathParaPr>
+                      <m:jc m:val="centerGroup"/>
+                    </m:oMathParaPr>
+                    <m:oMath xmlns:m="http://schemas.openxmlformats.org/officeDocument/2006/math">
+                      <m:r>
+                        <m:rPr>
+                          <m:sty m:val="p"/>
+                        </m:rPr>
+                        <a:rPr kumimoji="1" lang="el-GR" altLang="ja-JP" b="0" i="1" smtClean="0">
+                          <a:latin typeface="Cambria Math" panose="02040503050406030204" pitchFamily="18" charset="0"/>
+                          <a:ea typeface="Cambria Math" panose="02040503050406030204" pitchFamily="18" charset="0"/>
+                        </a:rPr>
+                        <m:t>Δ</m:t>
+                      </m:r>
+                      <m:sSub>
+                        <m:sSubPr>
+                          <m:ctrlPr>
+                            <a:rPr kumimoji="1" lang="en-US" altLang="ja-JP" b="0" i="1" smtClean="0">
+                              <a:latin typeface="Cambria Math" panose="02040503050406030204" pitchFamily="18" charset="0"/>
+                            </a:rPr>
+                          </m:ctrlPr>
+                        </m:sSubPr>
+                        <m:e>
+                          <m:r>
+                            <a:rPr kumimoji="1" lang="en-US" altLang="ja-JP" b="0" i="1" smtClean="0">
+                              <a:latin typeface="Cambria Math" panose="02040503050406030204" pitchFamily="18" charset="0"/>
+                            </a:rPr>
+                            <m:t>𝑥</m:t>
+                          </m:r>
+                        </m:e>
+                        <m:sub>
+                          <m:r>
+                            <a:rPr kumimoji="1" lang="en-US" altLang="ja-JP" b="0" i="1" smtClean="0">
+                              <a:latin typeface="Cambria Math" panose="02040503050406030204" pitchFamily="18" charset="0"/>
+                            </a:rPr>
+                            <m:t>𝑖</m:t>
+                          </m:r>
+                        </m:sub>
+                      </m:sSub>
+                    </m:oMath>
+                  </m:oMathPara>
+                </a14:m>
+                <a:endParaRPr kumimoji="1" lang="ja-JP" altLang="en-US"/>
+              </a:p>
+            </p:txBody>
+          </p:sp>
+        </mc:Choice>
+        <mc:Fallback>
+          <p:sp>
+            <p:nvSpPr>
+              <p:cNvPr id="14" name="テキスト ボックス 13">
+                <a:extLst>
+                  <a:ext uri="{FF2B5EF4-FFF2-40B4-BE49-F238E27FC236}">
+                    <a16:creationId xmlns:a16="http://schemas.microsoft.com/office/drawing/2014/main" id="{727B2896-D05B-832D-7B23-70492EF0ED89}"/>
+                  </a:ext>
+                </a:extLst>
+              </p:cNvPr>
+              <p:cNvSpPr txBox="1">
+                <a:spLocks noRot="1" noChangeAspect="1" noMove="1" noResize="1" noEditPoints="1" noAdjustHandles="1" noChangeArrowheads="1" noChangeShapeType="1" noTextEdit="1"/>
+              </p:cNvSpPr>
+              <p:nvPr/>
+            </p:nvSpPr>
+            <p:spPr>
+              <a:xfrm>
+                <a:off x="3239209" y="1993328"/>
+                <a:ext cx="380169" cy="276999"/>
+              </a:xfrm>
+              <a:prstGeom prst="rect">
+                <a:avLst/>
+              </a:prstGeom>
+              <a:blipFill>
+                <a:blip r:embed="rId6"/>
+                <a:stretch>
+                  <a:fillRect l="-12500" r="-3125" b="-17391"/>
+                </a:stretch>
+              </a:blipFill>
+            </p:spPr>
+            <p:txBody>
+              <a:bodyPr/>
+              <a:lstStyle/>
+              <a:p>
+                <a:r>
+                  <a:rPr lang="ja-JP" altLang="en-US">
+                    <a:noFill/>
+                  </a:rPr>
+                  <a:t> </a:t>
+                </a:r>
+              </a:p>
+            </p:txBody>
+          </p:sp>
+        </mc:Fallback>
+      </mc:AlternateContent>
+      <p:cxnSp>
+        <p:nvCxnSpPr>
+          <p:cNvPr id="16" name="直線矢印コネクタ 15">
+            <a:extLst>
+              <a:ext uri="{FF2B5EF4-FFF2-40B4-BE49-F238E27FC236}">
+                <a16:creationId xmlns:a16="http://schemas.microsoft.com/office/drawing/2014/main" id="{C8C60E29-825D-4E3F-1BFD-C1DD3AAA6C28}"/>
+              </a:ext>
+            </a:extLst>
+          </p:cNvPr>
+          <p:cNvCxnSpPr>
+            <a:cxnSpLocks/>
+          </p:cNvCxnSpPr>
+          <p:nvPr/>
+        </p:nvCxnSpPr>
+        <p:spPr>
+          <a:xfrm>
+            <a:off x="944656" y="5172102"/>
+            <a:ext cx="3533722" cy="0"/>
+          </a:xfrm>
+          <a:prstGeom prst="straightConnector1">
+            <a:avLst/>
+          </a:prstGeom>
+          <a:ln>
+            <a:tailEnd type="triangle"/>
+          </a:ln>
+        </p:spPr>
+        <p:style>
+          <a:lnRef idx="2">
+            <a:schemeClr val="accent1"/>
+          </a:lnRef>
+          <a:fillRef idx="0">
+            <a:schemeClr val="accent1"/>
+          </a:fillRef>
+          <a:effectRef idx="1">
+            <a:schemeClr val="accent1"/>
+          </a:effectRef>
+          <a:fontRef idx="minor">
+            <a:schemeClr val="tx1"/>
+          </a:fontRef>
+        </p:style>
+      </p:cxnSp>
+      <p:cxnSp>
+        <p:nvCxnSpPr>
+          <p:cNvPr id="17" name="直線矢印コネクタ 16">
+            <a:extLst>
+              <a:ext uri="{FF2B5EF4-FFF2-40B4-BE49-F238E27FC236}">
+                <a16:creationId xmlns:a16="http://schemas.microsoft.com/office/drawing/2014/main" id="{B439A52F-82C4-2B3F-DF71-43BBFB9E2BD4}"/>
+              </a:ext>
+            </a:extLst>
+          </p:cNvPr>
+          <p:cNvCxnSpPr>
+            <a:cxnSpLocks/>
+          </p:cNvCxnSpPr>
+          <p:nvPr/>
+        </p:nvCxnSpPr>
+        <p:spPr>
+          <a:xfrm flipV="1">
+            <a:off x="1182116" y="3247610"/>
+            <a:ext cx="0" cy="2140688"/>
+          </a:xfrm>
+          <a:prstGeom prst="straightConnector1">
+            <a:avLst/>
+          </a:prstGeom>
+          <a:ln>
+            <a:tailEnd type="triangle"/>
+          </a:ln>
+        </p:spPr>
+        <p:style>
+          <a:lnRef idx="2">
+            <a:schemeClr val="accent1"/>
+          </a:lnRef>
+          <a:fillRef idx="0">
+            <a:schemeClr val="accent1"/>
+          </a:fillRef>
+          <a:effectRef idx="1">
+            <a:schemeClr val="accent1"/>
+          </a:effectRef>
+          <a:fontRef idx="minor">
+            <a:schemeClr val="tx1"/>
+          </a:fontRef>
+        </p:style>
+      </p:cxnSp>
+      <mc:AlternateContent xmlns:mc="http://schemas.openxmlformats.org/markup-compatibility/2006">
+        <mc:Choice xmlns:a14="http://schemas.microsoft.com/office/drawing/2010/main" Requires="a14">
+          <p:sp>
+            <p:nvSpPr>
+              <p:cNvPr id="20" name="テキスト ボックス 19">
+                <a:extLst>
+                  <a:ext uri="{FF2B5EF4-FFF2-40B4-BE49-F238E27FC236}">
+                    <a16:creationId xmlns:a16="http://schemas.microsoft.com/office/drawing/2014/main" id="{738B4C59-557E-1A7F-07BD-348D7CE42310}"/>
+                  </a:ext>
+                </a:extLst>
+              </p:cNvPr>
+              <p:cNvSpPr txBox="1"/>
+              <p:nvPr/>
+            </p:nvSpPr>
+            <p:spPr>
+              <a:xfrm>
+                <a:off x="4560130" y="5033602"/>
+                <a:ext cx="380169" cy="276999"/>
+              </a:xfrm>
+              <a:prstGeom prst="rect">
+                <a:avLst/>
+              </a:prstGeom>
+              <a:noFill/>
+            </p:spPr>
+            <p:txBody>
+              <a:bodyPr wrap="none" lIns="0" tIns="0" rIns="0" bIns="0" rtlCol="0">
+                <a:spAutoFit/>
+              </a:bodyPr>
+              <a:lstStyle/>
+              <a:p>
+                <a14:m>
+                  <m:oMathPara xmlns:m="http://schemas.openxmlformats.org/officeDocument/2006/math">
+                    <m:oMathParaPr>
+                      <m:jc m:val="centerGroup"/>
+                    </m:oMathParaPr>
+                    <m:oMath xmlns:m="http://schemas.openxmlformats.org/officeDocument/2006/math">
+                      <m:r>
+                        <m:rPr>
+                          <m:sty m:val="p"/>
+                        </m:rPr>
+                        <a:rPr kumimoji="1" lang="el-GR" altLang="ja-JP" b="0" i="1" smtClean="0">
+                          <a:latin typeface="Cambria Math" panose="02040503050406030204" pitchFamily="18" charset="0"/>
+                          <a:ea typeface="Cambria Math" panose="02040503050406030204" pitchFamily="18" charset="0"/>
+                        </a:rPr>
+                        <m:t>Δ</m:t>
+                      </m:r>
+                      <m:sSub>
+                        <m:sSubPr>
+                          <m:ctrlPr>
+                            <a:rPr kumimoji="1" lang="en-US" altLang="ja-JP" b="0" i="1" smtClean="0">
+                              <a:latin typeface="Cambria Math" panose="02040503050406030204" pitchFamily="18" charset="0"/>
+                            </a:rPr>
+                          </m:ctrlPr>
+                        </m:sSubPr>
+                        <m:e>
+                          <m:r>
+                            <a:rPr kumimoji="1" lang="en-US" altLang="ja-JP" b="0" i="1" smtClean="0">
+                              <a:latin typeface="Cambria Math" panose="02040503050406030204" pitchFamily="18" charset="0"/>
+                            </a:rPr>
+                            <m:t>𝑥</m:t>
+                          </m:r>
+                        </m:e>
+                        <m:sub>
+                          <m:r>
+                            <a:rPr kumimoji="1" lang="en-US" altLang="ja-JP" b="0" i="1" smtClean="0">
+                              <a:latin typeface="Cambria Math" panose="02040503050406030204" pitchFamily="18" charset="0"/>
+                            </a:rPr>
+                            <m:t>𝑖</m:t>
+                          </m:r>
+                        </m:sub>
+                      </m:sSub>
+                    </m:oMath>
+                  </m:oMathPara>
+                </a14:m>
+                <a:endParaRPr kumimoji="1" lang="ja-JP" altLang="en-US"/>
+              </a:p>
+            </p:txBody>
+          </p:sp>
+        </mc:Choice>
+        <mc:Fallback>
+          <p:sp>
+            <p:nvSpPr>
+              <p:cNvPr id="20" name="テキスト ボックス 19">
+                <a:extLst>
+                  <a:ext uri="{FF2B5EF4-FFF2-40B4-BE49-F238E27FC236}">
+                    <a16:creationId xmlns:a16="http://schemas.microsoft.com/office/drawing/2014/main" id="{738B4C59-557E-1A7F-07BD-348D7CE42310}"/>
+                  </a:ext>
+                </a:extLst>
+              </p:cNvPr>
+              <p:cNvSpPr txBox="1">
+                <a:spLocks noRot="1" noChangeAspect="1" noMove="1" noResize="1" noEditPoints="1" noAdjustHandles="1" noChangeArrowheads="1" noChangeShapeType="1" noTextEdit="1"/>
+              </p:cNvSpPr>
+              <p:nvPr/>
+            </p:nvSpPr>
+            <p:spPr>
+              <a:xfrm>
+                <a:off x="4560130" y="5033602"/>
+                <a:ext cx="380169" cy="276999"/>
+              </a:xfrm>
+              <a:prstGeom prst="rect">
+                <a:avLst/>
+              </a:prstGeom>
+              <a:blipFill>
+                <a:blip r:embed="rId7"/>
+                <a:stretch>
+                  <a:fillRect l="-16667" r="-6667" b="-13043"/>
+                </a:stretch>
+              </a:blipFill>
+            </p:spPr>
+            <p:txBody>
+              <a:bodyPr/>
+              <a:lstStyle/>
+              <a:p>
+                <a:r>
+                  <a:rPr lang="ja-JP" altLang="en-US">
+                    <a:noFill/>
+                  </a:rPr>
+                  <a:t> </a:t>
+                </a:r>
+              </a:p>
+            </p:txBody>
+          </p:sp>
+        </mc:Fallback>
+      </mc:AlternateContent>
+      <mc:AlternateContent xmlns:mc="http://schemas.openxmlformats.org/markup-compatibility/2006">
+        <mc:Choice xmlns:a14="http://schemas.microsoft.com/office/drawing/2010/main" Requires="a14">
+          <p:sp>
+            <p:nvSpPr>
+              <p:cNvPr id="21" name="テキスト ボックス 20">
+                <a:extLst>
+                  <a:ext uri="{FF2B5EF4-FFF2-40B4-BE49-F238E27FC236}">
+                    <a16:creationId xmlns:a16="http://schemas.microsoft.com/office/drawing/2014/main" id="{087550B2-FA97-4FC4-853E-41FD7FCBB52A}"/>
+                  </a:ext>
+                </a:extLst>
+              </p:cNvPr>
+              <p:cNvSpPr txBox="1"/>
+              <p:nvPr/>
+            </p:nvSpPr>
+            <p:spPr>
+              <a:xfrm>
+                <a:off x="951572" y="5198130"/>
+                <a:ext cx="207621" cy="276999"/>
+              </a:xfrm>
+              <a:prstGeom prst="rect">
+                <a:avLst/>
+              </a:prstGeom>
+              <a:noFill/>
+            </p:spPr>
+            <p:txBody>
+              <a:bodyPr wrap="none" lIns="0" tIns="0" rIns="0" bIns="0" rtlCol="0">
+                <a:spAutoFit/>
+              </a:bodyPr>
+              <a:lstStyle/>
+              <a:p>
+                <a14:m>
+                  <m:oMathPara xmlns:m="http://schemas.openxmlformats.org/officeDocument/2006/math">
+                    <m:oMathParaPr>
+                      <m:jc m:val="centerGroup"/>
+                    </m:oMathParaPr>
+                    <m:oMath xmlns:m="http://schemas.openxmlformats.org/officeDocument/2006/math">
+                      <m:r>
+                        <a:rPr kumimoji="1" lang="en-US" altLang="ja-JP" b="0" i="1" smtClean="0">
+                          <a:latin typeface="Cambria Math" panose="02040503050406030204" pitchFamily="18" charset="0"/>
+                        </a:rPr>
+                        <m:t>𝑂</m:t>
+                      </m:r>
+                    </m:oMath>
+                  </m:oMathPara>
+                </a14:m>
+                <a:endParaRPr kumimoji="1" lang="ja-JP" altLang="en-US"/>
+              </a:p>
+            </p:txBody>
+          </p:sp>
+        </mc:Choice>
+        <mc:Fallback>
+          <p:sp>
+            <p:nvSpPr>
+              <p:cNvPr id="21" name="テキスト ボックス 20">
+                <a:extLst>
+                  <a:ext uri="{FF2B5EF4-FFF2-40B4-BE49-F238E27FC236}">
+                    <a16:creationId xmlns:a16="http://schemas.microsoft.com/office/drawing/2014/main" id="{087550B2-FA97-4FC4-853E-41FD7FCBB52A}"/>
+                  </a:ext>
+                </a:extLst>
+              </p:cNvPr>
+              <p:cNvSpPr txBox="1">
+                <a:spLocks noRot="1" noChangeAspect="1" noMove="1" noResize="1" noEditPoints="1" noAdjustHandles="1" noChangeArrowheads="1" noChangeShapeType="1" noTextEdit="1"/>
+              </p:cNvSpPr>
+              <p:nvPr/>
+            </p:nvSpPr>
+            <p:spPr>
+              <a:xfrm>
+                <a:off x="951572" y="5198130"/>
+                <a:ext cx="207621" cy="276999"/>
+              </a:xfrm>
+              <a:prstGeom prst="rect">
+                <a:avLst/>
+              </a:prstGeom>
+              <a:blipFill>
+                <a:blip r:embed="rId8"/>
+                <a:stretch>
+                  <a:fillRect l="-22222" r="-22222" b="-4348"/>
+                </a:stretch>
+              </a:blipFill>
+            </p:spPr>
+            <p:txBody>
+              <a:bodyPr/>
+              <a:lstStyle/>
+              <a:p>
+                <a:r>
+                  <a:rPr lang="ja-JP" altLang="en-US">
+                    <a:noFill/>
+                  </a:rPr>
+                  <a:t> </a:t>
+                </a:r>
+              </a:p>
+            </p:txBody>
+          </p:sp>
+        </mc:Fallback>
+      </mc:AlternateContent>
+      <mc:AlternateContent xmlns:mc="http://schemas.openxmlformats.org/markup-compatibility/2006">
+        <mc:Choice xmlns:a14="http://schemas.microsoft.com/office/drawing/2010/main" Requires="a14">
+          <p:sp>
+            <p:nvSpPr>
+              <p:cNvPr id="22" name="テキスト ボックス 21">
+                <a:extLst>
+                  <a:ext uri="{FF2B5EF4-FFF2-40B4-BE49-F238E27FC236}">
+                    <a16:creationId xmlns:a16="http://schemas.microsoft.com/office/drawing/2014/main" id="{D793356D-E0C5-D74B-C55A-C6CF74713C7D}"/>
+                  </a:ext>
+                </a:extLst>
+              </p:cNvPr>
+              <p:cNvSpPr txBox="1"/>
+              <p:nvPr/>
+            </p:nvSpPr>
+            <p:spPr>
+              <a:xfrm>
+                <a:off x="754571" y="2970611"/>
+                <a:ext cx="724109" cy="276999"/>
+              </a:xfrm>
+              <a:prstGeom prst="rect">
+                <a:avLst/>
+              </a:prstGeom>
+              <a:noFill/>
+            </p:spPr>
+            <p:txBody>
+              <a:bodyPr wrap="none" lIns="0" tIns="0" rIns="0" bIns="0" rtlCol="0">
+                <a:spAutoFit/>
+              </a:bodyPr>
+              <a:lstStyle/>
+              <a:p>
+                <a14:m>
+                  <m:oMathPara xmlns:m="http://schemas.openxmlformats.org/officeDocument/2006/math">
+                    <m:oMathParaPr>
+                      <m:jc m:val="centerGroup"/>
+                    </m:oMathParaPr>
+                    <m:oMath xmlns:m="http://schemas.openxmlformats.org/officeDocument/2006/math">
+                      <m:r>
+                        <a:rPr kumimoji="1" lang="en-US" altLang="ja-JP" b="0" i="1" smtClean="0">
+                          <a:latin typeface="Cambria Math" panose="02040503050406030204" pitchFamily="18" charset="0"/>
+                          <a:ea typeface="Cambria Math" panose="02040503050406030204" pitchFamily="18" charset="0"/>
+                        </a:rPr>
+                        <m:t>𝑉</m:t>
+                      </m:r>
+                      <m:r>
+                        <a:rPr kumimoji="1" lang="en-US" altLang="ja-JP" b="0" i="1" smtClean="0">
+                          <a:latin typeface="Cambria Math" panose="02040503050406030204" pitchFamily="18" charset="0"/>
+                          <a:ea typeface="Cambria Math" panose="02040503050406030204" pitchFamily="18" charset="0"/>
+                        </a:rPr>
+                        <m:t>(</m:t>
+                      </m:r>
+                      <m:r>
+                        <m:rPr>
+                          <m:sty m:val="p"/>
+                        </m:rPr>
+                        <a:rPr kumimoji="1" lang="el-GR" altLang="ja-JP" b="0" i="1" smtClean="0">
+                          <a:latin typeface="Cambria Math" panose="02040503050406030204" pitchFamily="18" charset="0"/>
+                          <a:ea typeface="Cambria Math" panose="02040503050406030204" pitchFamily="18" charset="0"/>
+                        </a:rPr>
+                        <m:t>Δ</m:t>
+                      </m:r>
+                      <m:sSub>
+                        <m:sSubPr>
+                          <m:ctrlPr>
+                            <a:rPr kumimoji="1" lang="en-US" altLang="ja-JP" b="0" i="1" smtClean="0">
+                              <a:latin typeface="Cambria Math" panose="02040503050406030204" pitchFamily="18" charset="0"/>
+                            </a:rPr>
+                          </m:ctrlPr>
+                        </m:sSubPr>
+                        <m:e>
+                          <m:r>
+                            <a:rPr kumimoji="1" lang="en-US" altLang="ja-JP" b="0" i="1" smtClean="0">
+                              <a:latin typeface="Cambria Math" panose="02040503050406030204" pitchFamily="18" charset="0"/>
+                            </a:rPr>
+                            <m:t>𝑥</m:t>
+                          </m:r>
+                        </m:e>
+                        <m:sub>
+                          <m:r>
+                            <a:rPr kumimoji="1" lang="en-US" altLang="ja-JP" b="0" i="1" smtClean="0">
+                              <a:latin typeface="Cambria Math" panose="02040503050406030204" pitchFamily="18" charset="0"/>
+                            </a:rPr>
+                            <m:t>𝑖</m:t>
+                          </m:r>
+                        </m:sub>
+                      </m:sSub>
+                      <m:r>
+                        <a:rPr kumimoji="1" lang="en-US" altLang="ja-JP" b="0" i="1" smtClean="0">
+                          <a:latin typeface="Cambria Math" panose="02040503050406030204" pitchFamily="18" charset="0"/>
+                        </a:rPr>
+                        <m:t>)</m:t>
+                      </m:r>
+                    </m:oMath>
+                  </m:oMathPara>
+                </a14:m>
+                <a:endParaRPr kumimoji="1" lang="ja-JP" altLang="en-US"/>
+              </a:p>
+            </p:txBody>
+          </p:sp>
+        </mc:Choice>
+        <mc:Fallback>
+          <p:sp>
+            <p:nvSpPr>
+              <p:cNvPr id="22" name="テキスト ボックス 21">
+                <a:extLst>
+                  <a:ext uri="{FF2B5EF4-FFF2-40B4-BE49-F238E27FC236}">
+                    <a16:creationId xmlns:a16="http://schemas.microsoft.com/office/drawing/2014/main" id="{D793356D-E0C5-D74B-C55A-C6CF74713C7D}"/>
+                  </a:ext>
+                </a:extLst>
+              </p:cNvPr>
+              <p:cNvSpPr txBox="1">
+                <a:spLocks noRot="1" noChangeAspect="1" noMove="1" noResize="1" noEditPoints="1" noAdjustHandles="1" noChangeArrowheads="1" noChangeShapeType="1" noTextEdit="1"/>
+              </p:cNvSpPr>
+              <p:nvPr/>
+            </p:nvSpPr>
+            <p:spPr>
+              <a:xfrm>
+                <a:off x="754571" y="2970611"/>
+                <a:ext cx="724109" cy="276999"/>
+              </a:xfrm>
+              <a:prstGeom prst="rect">
+                <a:avLst/>
+              </a:prstGeom>
+              <a:blipFill>
+                <a:blip r:embed="rId9"/>
+                <a:stretch>
+                  <a:fillRect l="-6897" r="-10345" b="-34783"/>
+                </a:stretch>
+              </a:blipFill>
+            </p:spPr>
+            <p:txBody>
+              <a:bodyPr/>
+              <a:lstStyle/>
+              <a:p>
+                <a:r>
+                  <a:rPr lang="ja-JP" altLang="en-US">
+                    <a:noFill/>
+                  </a:rPr>
+                  <a:t> </a:t>
+                </a:r>
+              </a:p>
+            </p:txBody>
+          </p:sp>
+        </mc:Fallback>
+      </mc:AlternateContent>
+      <p:sp>
+        <p:nvSpPr>
+          <p:cNvPr id="23" name="フリーフォーム 22">
+            <a:extLst>
+              <a:ext uri="{FF2B5EF4-FFF2-40B4-BE49-F238E27FC236}">
+                <a16:creationId xmlns:a16="http://schemas.microsoft.com/office/drawing/2014/main" id="{983D8031-4682-18D9-408A-342A445F08F9}"/>
+              </a:ext>
+            </a:extLst>
+          </p:cNvPr>
+          <p:cNvSpPr/>
+          <p:nvPr/>
+        </p:nvSpPr>
+        <p:spPr>
+          <a:xfrm>
+            <a:off x="1189205" y="3429000"/>
+            <a:ext cx="3221665" cy="1743103"/>
+          </a:xfrm>
+          <a:custGeom>
+            <a:avLst/>
+            <a:gdLst>
+              <a:gd name="csX0" fmla="*/ 0 w 3221665"/>
+              <a:gd name="csY0" fmla="*/ 1743103 h 1743103"/>
+              <a:gd name="csX1" fmla="*/ 1350335 w 3221665"/>
+              <a:gd name="csY1" fmla="*/ 1445392 h 1743103"/>
+              <a:gd name="csX2" fmla="*/ 1967024 w 3221665"/>
+              <a:gd name="csY2" fmla="*/ 212015 h 1743103"/>
+              <a:gd name="csX3" fmla="*/ 3221665 w 3221665"/>
+              <a:gd name="csY3" fmla="*/ 9996 h 1743103"/>
+            </a:gdLst>
+            <a:ahLst/>
+            <a:cxnLst>
+              <a:cxn ang="0">
+                <a:pos x="csX0" y="csY0"/>
+              </a:cxn>
+              <a:cxn ang="0">
+                <a:pos x="csX1" y="csY1"/>
+              </a:cxn>
+              <a:cxn ang="0">
+                <a:pos x="csX2" y="csY2"/>
+              </a:cxn>
+              <a:cxn ang="0">
+                <a:pos x="csX3" y="csY3"/>
+              </a:cxn>
+            </a:cxnLst>
+            <a:rect l="l" t="t" r="r" b="b"/>
+            <a:pathLst>
+              <a:path w="3221665" h="1743103">
+                <a:moveTo>
+                  <a:pt x="0" y="1743103"/>
+                </a:moveTo>
+                <a:cubicBezTo>
+                  <a:pt x="511249" y="1721838"/>
+                  <a:pt x="1022498" y="1700573"/>
+                  <a:pt x="1350335" y="1445392"/>
+                </a:cubicBezTo>
+                <a:cubicBezTo>
+                  <a:pt x="1678172" y="1190211"/>
+                  <a:pt x="1655136" y="451248"/>
+                  <a:pt x="1967024" y="212015"/>
+                </a:cubicBezTo>
+                <a:cubicBezTo>
+                  <a:pt x="2278912" y="-27218"/>
+                  <a:pt x="2750288" y="-8611"/>
+                  <a:pt x="3221665" y="9996"/>
+                </a:cubicBezTo>
+              </a:path>
+            </a:pathLst>
+          </a:custGeom>
+          <a:noFill/>
+        </p:spPr>
+        <p:style>
+          <a:lnRef idx="2">
+            <a:schemeClr val="accent1">
+              <a:shade val="15000"/>
+            </a:schemeClr>
+          </a:lnRef>
+          <a:fillRef idx="1">
+            <a:schemeClr val="accent1"/>
+          </a:fillRef>
+          <a:effectRef idx="0">
+            <a:schemeClr val="accent1"/>
+          </a:effectRef>
+          <a:fontRef idx="minor">
+            <a:schemeClr val="lt1"/>
+          </a:fontRef>
+        </p:style>
+        <p:txBody>
+          <a:bodyPr rtlCol="0" anchor="ctr"/>
+          <a:lstStyle/>
+          <a:p>
+            <a:pPr algn="ctr"/>
+            <a:endParaRPr kumimoji="1" lang="ja-JP" altLang="en-US"/>
+          </a:p>
+        </p:txBody>
+      </p:sp>
+      <p:sp>
+        <p:nvSpPr>
+          <p:cNvPr id="24" name="テキスト ボックス 23">
+            <a:extLst>
+              <a:ext uri="{FF2B5EF4-FFF2-40B4-BE49-F238E27FC236}">
+                <a16:creationId xmlns:a16="http://schemas.microsoft.com/office/drawing/2014/main" id="{DAB5B843-9091-C3BE-E18F-2A23615B3FFF}"/>
+              </a:ext>
+            </a:extLst>
+          </p:cNvPr>
+          <p:cNvSpPr txBox="1"/>
+          <p:nvPr/>
+        </p:nvSpPr>
+        <p:spPr>
+          <a:xfrm>
+            <a:off x="315084" y="248058"/>
+            <a:ext cx="488660" cy="369332"/>
+          </a:xfrm>
+          <a:prstGeom prst="rect">
+            <a:avLst/>
+          </a:prstGeom>
+          <a:noFill/>
+        </p:spPr>
+        <p:txBody>
+          <a:bodyPr wrap="none" rtlCol="0">
+            <a:spAutoFit/>
+          </a:bodyPr>
+          <a:lstStyle/>
+          <a:p>
+            <a:r>
+              <a:rPr kumimoji="1" lang="en-US" altLang="ja-JP" dirty="0"/>
+              <a:t>(a) </a:t>
+            </a:r>
+            <a:endParaRPr kumimoji="1" lang="ja-JP" altLang="en-US"/>
+          </a:p>
+        </p:txBody>
+      </p:sp>
+      <p:sp>
+        <p:nvSpPr>
+          <p:cNvPr id="25" name="テキスト ボックス 24">
+            <a:extLst>
+              <a:ext uri="{FF2B5EF4-FFF2-40B4-BE49-F238E27FC236}">
+                <a16:creationId xmlns:a16="http://schemas.microsoft.com/office/drawing/2014/main" id="{6EB55B3B-540A-896D-323D-71233A84BB3F}"/>
+              </a:ext>
+            </a:extLst>
+          </p:cNvPr>
+          <p:cNvSpPr txBox="1"/>
+          <p:nvPr/>
+        </p:nvSpPr>
+        <p:spPr>
+          <a:xfrm>
+            <a:off x="315084" y="2553432"/>
+            <a:ext cx="495649" cy="369332"/>
+          </a:xfrm>
+          <a:prstGeom prst="rect">
+            <a:avLst/>
+          </a:prstGeom>
+          <a:noFill/>
+        </p:spPr>
+        <p:txBody>
+          <a:bodyPr wrap="none" rtlCol="0">
+            <a:spAutoFit/>
+          </a:bodyPr>
+          <a:lstStyle/>
+          <a:p>
+            <a:r>
+              <a:rPr kumimoji="1" lang="en-US" altLang="ja-JP" dirty="0"/>
+              <a:t>(b) </a:t>
+            </a:r>
+            <a:endParaRPr kumimoji="1" lang="ja-JP" altLang="en-US"/>
+          </a:p>
+        </p:txBody>
+      </p:sp>
     </p:spTree>
     <p:extLst>
       <p:ext uri="{BB962C8B-B14F-4D97-AF65-F5344CB8AC3E}">
-        <p14:creationId xmlns:p14="http://schemas.microsoft.com/office/powerpoint/2010/main" val="580327406"/>
+        <p14:creationId xmlns:p14="http://schemas.microsoft.com/office/powerpoint/2010/main" val="2484215685"/>
       </p:ext>
     </p:extLst>
   </p:cSld>
@@ -1663,6 +2608,380 @@
     <p:extLst>
       <p:ext uri="{BB962C8B-B14F-4D97-AF65-F5344CB8AC3E}">
         <p14:creationId xmlns:p14="http://schemas.microsoft.com/office/powerpoint/2010/main" val="3568578973"/>
+      </p:ext>
+    </p:extLst>
+  </p:cSld>
+  <p:clrMapOvr>
+    <a:masterClrMapping/>
+  </p:clrMapOvr>
+</p:sld>
+</file>
+
+<file path=ppt/slides/slide4.xml><?xml version="1.0" encoding="utf-8"?>
+<p:sld xmlns:a="http://schemas.openxmlformats.org/drawingml/2006/main" xmlns:r="http://schemas.openxmlformats.org/officeDocument/2006/relationships" xmlns:p="http://schemas.openxmlformats.org/presentationml/2006/main">
+  <p:cSld>
+    <p:spTree>
+      <p:nvGrpSpPr>
+        <p:cNvPr id="1" name=""/>
+        <p:cNvGrpSpPr/>
+        <p:nvPr/>
+      </p:nvGrpSpPr>
+      <p:grpSpPr>
+        <a:xfrm>
+          <a:off x="0" y="0"/>
+          <a:ext cx="0" cy="0"/>
+          <a:chOff x="0" y="0"/>
+          <a:chExt cx="0" cy="0"/>
+        </a:xfrm>
+      </p:grpSpPr>
+      <p:pic>
+        <p:nvPicPr>
+          <p:cNvPr id="2" name="図 1" descr="男性の表情のイラスト「疑問」">
+            <a:extLst>
+              <a:ext uri="{FF2B5EF4-FFF2-40B4-BE49-F238E27FC236}">
+                <a16:creationId xmlns:a16="http://schemas.microsoft.com/office/drawing/2014/main" id="{9F73AB59-A488-E18D-FA8E-B85C05B6BD4A}"/>
+              </a:ext>
+            </a:extLst>
+          </p:cNvPr>
+          <p:cNvPicPr>
+            <a:picLocks noChangeAspect="1"/>
+          </p:cNvPicPr>
+          <p:nvPr/>
+        </p:nvPicPr>
+        <p:blipFill>
+          <a:blip r:embed="rId2"/>
+          <a:stretch>
+            <a:fillRect/>
+          </a:stretch>
+        </p:blipFill>
+        <p:spPr>
+          <a:xfrm>
+            <a:off x="5196219" y="940981"/>
+            <a:ext cx="1409700" cy="1905000"/>
+          </a:xfrm>
+          <a:prstGeom prst="rect">
+            <a:avLst/>
+          </a:prstGeom>
+        </p:spPr>
+      </p:pic>
+      <p:pic>
+        <p:nvPicPr>
+          <p:cNvPr id="3" name="図 2" descr="お店の建物のイラスト1">
+            <a:extLst>
+              <a:ext uri="{FF2B5EF4-FFF2-40B4-BE49-F238E27FC236}">
+                <a16:creationId xmlns:a16="http://schemas.microsoft.com/office/drawing/2014/main" id="{8B8F6241-495F-DF57-4AC0-4BDDD5B33FFE}"/>
+              </a:ext>
+            </a:extLst>
+          </p:cNvPr>
+          <p:cNvPicPr>
+            <a:picLocks noChangeAspect="1"/>
+          </p:cNvPicPr>
+          <p:nvPr/>
+        </p:nvPicPr>
+        <p:blipFill>
+          <a:blip r:embed="rId3"/>
+          <a:stretch>
+            <a:fillRect/>
+          </a:stretch>
+        </p:blipFill>
+        <p:spPr>
+          <a:xfrm>
+            <a:off x="1400514" y="4259817"/>
+            <a:ext cx="1270000" cy="1193800"/>
+          </a:xfrm>
+          <a:prstGeom prst="rect">
+            <a:avLst/>
+          </a:prstGeom>
+        </p:spPr>
+      </p:pic>
+      <p:pic>
+        <p:nvPicPr>
+          <p:cNvPr id="4" name="図 3" descr="お店の建物のイラスト6">
+            <a:extLst>
+              <a:ext uri="{FF2B5EF4-FFF2-40B4-BE49-F238E27FC236}">
+                <a16:creationId xmlns:a16="http://schemas.microsoft.com/office/drawing/2014/main" id="{8B14454F-A974-9EE7-D4FC-70E7577E5D00}"/>
+              </a:ext>
+            </a:extLst>
+          </p:cNvPr>
+          <p:cNvPicPr>
+            <a:picLocks noChangeAspect="1"/>
+          </p:cNvPicPr>
+          <p:nvPr/>
+        </p:nvPicPr>
+        <p:blipFill>
+          <a:blip r:embed="rId4"/>
+          <a:stretch>
+            <a:fillRect/>
+          </a:stretch>
+        </p:blipFill>
+        <p:spPr>
+          <a:xfrm>
+            <a:off x="5838488" y="4259817"/>
+            <a:ext cx="1270000" cy="1193800"/>
+          </a:xfrm>
+          <a:prstGeom prst="rect">
+            <a:avLst/>
+          </a:prstGeom>
+        </p:spPr>
+      </p:pic>
+      <p:pic>
+        <p:nvPicPr>
+          <p:cNvPr id="5" name="図 4" descr="会社の建物のアイコン（大企業）">
+            <a:extLst>
+              <a:ext uri="{FF2B5EF4-FFF2-40B4-BE49-F238E27FC236}">
+                <a16:creationId xmlns:a16="http://schemas.microsoft.com/office/drawing/2014/main" id="{C9EB71D8-057A-9E39-C60B-DEE4AD3C5E93}"/>
+              </a:ext>
+            </a:extLst>
+          </p:cNvPr>
+          <p:cNvPicPr>
+            <a:picLocks noChangeAspect="1"/>
+          </p:cNvPicPr>
+          <p:nvPr/>
+        </p:nvPicPr>
+        <p:blipFill>
+          <a:blip r:embed="rId5"/>
+          <a:stretch>
+            <a:fillRect/>
+          </a:stretch>
+        </p:blipFill>
+        <p:spPr>
+          <a:xfrm>
+            <a:off x="3340099" y="1467882"/>
+            <a:ext cx="1356592" cy="1193801"/>
+          </a:xfrm>
+          <a:prstGeom prst="rect">
+            <a:avLst/>
+          </a:prstGeom>
+        </p:spPr>
+      </p:pic>
+      <p:pic>
+        <p:nvPicPr>
+          <p:cNvPr id="8" name="図 7" descr="グラスに入ったビールのイラスト">
+            <a:extLst>
+              <a:ext uri="{FF2B5EF4-FFF2-40B4-BE49-F238E27FC236}">
+                <a16:creationId xmlns:a16="http://schemas.microsoft.com/office/drawing/2014/main" id="{8C4695BB-981D-4C69-6B97-DC898E83A349}"/>
+              </a:ext>
+            </a:extLst>
+          </p:cNvPr>
+          <p:cNvPicPr>
+            <a:picLocks noChangeAspect="1"/>
+          </p:cNvPicPr>
+          <p:nvPr/>
+        </p:nvPicPr>
+        <p:blipFill>
+          <a:blip r:embed="rId6"/>
+          <a:stretch>
+            <a:fillRect/>
+          </a:stretch>
+        </p:blipFill>
+        <p:spPr>
+          <a:xfrm>
+            <a:off x="2604629" y="4335278"/>
+            <a:ext cx="860374" cy="1042877"/>
+          </a:xfrm>
+          <a:prstGeom prst="rect">
+            <a:avLst/>
+          </a:prstGeom>
+        </p:spPr>
+      </p:pic>
+      <p:pic>
+        <p:nvPicPr>
+          <p:cNvPr id="9" name="図 8" descr="ビールのイラスト「ジョッキビール」">
+            <a:extLst>
+              <a:ext uri="{FF2B5EF4-FFF2-40B4-BE49-F238E27FC236}">
+                <a16:creationId xmlns:a16="http://schemas.microsoft.com/office/drawing/2014/main" id="{CA320A00-58F2-6A8B-4BEC-C0B788072BE6}"/>
+              </a:ext>
+            </a:extLst>
+          </p:cNvPr>
+          <p:cNvPicPr>
+            <a:picLocks noChangeAspect="1"/>
+          </p:cNvPicPr>
+          <p:nvPr/>
+        </p:nvPicPr>
+        <p:blipFill>
+          <a:blip r:embed="rId7"/>
+          <a:stretch>
+            <a:fillRect/>
+          </a:stretch>
+        </p:blipFill>
+        <p:spPr>
+          <a:xfrm>
+            <a:off x="4723693" y="4183617"/>
+            <a:ext cx="984250" cy="1270000"/>
+          </a:xfrm>
+          <a:prstGeom prst="rect">
+            <a:avLst/>
+          </a:prstGeom>
+        </p:spPr>
+      </p:pic>
+      <p:sp>
+        <p:nvSpPr>
+          <p:cNvPr id="10" name="テキスト ボックス 9">
+            <a:extLst>
+              <a:ext uri="{FF2B5EF4-FFF2-40B4-BE49-F238E27FC236}">
+                <a16:creationId xmlns:a16="http://schemas.microsoft.com/office/drawing/2014/main" id="{D75270D7-7A38-546C-9BBA-6819ADC16F16}"/>
+              </a:ext>
+            </a:extLst>
+          </p:cNvPr>
+          <p:cNvSpPr txBox="1"/>
+          <p:nvPr/>
+        </p:nvSpPr>
+        <p:spPr>
+          <a:xfrm>
+            <a:off x="1841379" y="5453617"/>
+            <a:ext cx="707245" cy="369332"/>
+          </a:xfrm>
+          <a:prstGeom prst="rect">
+            <a:avLst/>
+          </a:prstGeom>
+          <a:noFill/>
+        </p:spPr>
+        <p:txBody>
+          <a:bodyPr wrap="none" rtlCol="0">
+            <a:spAutoFit/>
+          </a:bodyPr>
+          <a:lstStyle/>
+          <a:p>
+            <a:r>
+              <a:rPr kumimoji="1" lang="en-US" altLang="ja-JP" dirty="0"/>
+              <a:t>Bar A</a:t>
+            </a:r>
+            <a:endParaRPr kumimoji="1" lang="ja-JP" altLang="en-US"/>
+          </a:p>
+        </p:txBody>
+      </p:sp>
+      <p:sp>
+        <p:nvSpPr>
+          <p:cNvPr id="11" name="テキスト ボックス 10">
+            <a:extLst>
+              <a:ext uri="{FF2B5EF4-FFF2-40B4-BE49-F238E27FC236}">
+                <a16:creationId xmlns:a16="http://schemas.microsoft.com/office/drawing/2014/main" id="{E8671FB5-2A53-4D6A-E239-46D19FF3E9E5}"/>
+              </a:ext>
+            </a:extLst>
+          </p:cNvPr>
+          <p:cNvSpPr txBox="1"/>
+          <p:nvPr/>
+        </p:nvSpPr>
+        <p:spPr>
+          <a:xfrm>
+            <a:off x="5562837" y="5453617"/>
+            <a:ext cx="710451" cy="369332"/>
+          </a:xfrm>
+          <a:prstGeom prst="rect">
+            <a:avLst/>
+          </a:prstGeom>
+          <a:noFill/>
+        </p:spPr>
+        <p:txBody>
+          <a:bodyPr wrap="none" rtlCol="0">
+            <a:spAutoFit/>
+          </a:bodyPr>
+          <a:lstStyle/>
+          <a:p>
+            <a:r>
+              <a:rPr kumimoji="1" lang="en-US" altLang="ja-JP" dirty="0"/>
+              <a:t>Bar B</a:t>
+            </a:r>
+            <a:endParaRPr kumimoji="1" lang="ja-JP" altLang="en-US"/>
+          </a:p>
+        </p:txBody>
+      </p:sp>
+      <p:sp>
+        <p:nvSpPr>
+          <p:cNvPr id="12" name="下矢印 11">
+            <a:extLst>
+              <a:ext uri="{FF2B5EF4-FFF2-40B4-BE49-F238E27FC236}">
+                <a16:creationId xmlns:a16="http://schemas.microsoft.com/office/drawing/2014/main" id="{27F195CD-99B3-2D34-DFF1-A5A73D0D531D}"/>
+              </a:ext>
+            </a:extLst>
+          </p:cNvPr>
+          <p:cNvSpPr/>
+          <p:nvPr/>
+        </p:nvSpPr>
+        <p:spPr>
+          <a:xfrm rot="2700000">
+            <a:off x="3065359" y="2889988"/>
+            <a:ext cx="549482" cy="1109331"/>
+          </a:xfrm>
+          <a:prstGeom prst="downArrow">
+            <a:avLst/>
+          </a:prstGeom>
+        </p:spPr>
+        <p:style>
+          <a:lnRef idx="2">
+            <a:schemeClr val="accent1">
+              <a:shade val="15000"/>
+            </a:schemeClr>
+          </a:lnRef>
+          <a:fillRef idx="1">
+            <a:schemeClr val="accent1"/>
+          </a:fillRef>
+          <a:effectRef idx="0">
+            <a:schemeClr val="accent1"/>
+          </a:effectRef>
+          <a:fontRef idx="minor">
+            <a:schemeClr val="lt1"/>
+          </a:fontRef>
+        </p:style>
+        <p:txBody>
+          <a:bodyPr rtlCol="0" anchor="ctr"/>
+          <a:lstStyle/>
+          <a:p>
+            <a:pPr algn="ctr"/>
+            <a:endParaRPr kumimoji="1" lang="ja-JP" altLang="en-US"/>
+          </a:p>
+        </p:txBody>
+      </p:sp>
+      <p:sp>
+        <p:nvSpPr>
+          <p:cNvPr id="13" name="下矢印 12">
+            <a:extLst>
+              <a:ext uri="{FF2B5EF4-FFF2-40B4-BE49-F238E27FC236}">
+                <a16:creationId xmlns:a16="http://schemas.microsoft.com/office/drawing/2014/main" id="{C4556082-C4FF-36B4-7730-0D49B50A9AEE}"/>
+              </a:ext>
+            </a:extLst>
+          </p:cNvPr>
+          <p:cNvSpPr/>
+          <p:nvPr/>
+        </p:nvSpPr>
+        <p:spPr>
+          <a:xfrm rot="18900000">
+            <a:off x="4421950" y="2889988"/>
+            <a:ext cx="549482" cy="1109331"/>
+          </a:xfrm>
+          <a:prstGeom prst="downArrow">
+            <a:avLst/>
+          </a:prstGeom>
+        </p:spPr>
+        <p:style>
+          <a:lnRef idx="2">
+            <a:schemeClr val="accent1">
+              <a:shade val="15000"/>
+            </a:schemeClr>
+          </a:lnRef>
+          <a:fillRef idx="1">
+            <a:schemeClr val="accent1"/>
+          </a:fillRef>
+          <a:effectRef idx="0">
+            <a:schemeClr val="accent1"/>
+          </a:effectRef>
+          <a:fontRef idx="minor">
+            <a:schemeClr val="lt1"/>
+          </a:fontRef>
+        </p:style>
+        <p:txBody>
+          <a:bodyPr rtlCol="0" anchor="ctr"/>
+          <a:lstStyle/>
+          <a:p>
+            <a:pPr algn="ctr"/>
+            <a:endParaRPr kumimoji="1" lang="ja-JP" altLang="en-US"/>
+          </a:p>
+        </p:txBody>
+      </p:sp>
+    </p:spTree>
+    <p:extLst>
+      <p:ext uri="{BB962C8B-B14F-4D97-AF65-F5344CB8AC3E}">
+        <p14:creationId xmlns:p14="http://schemas.microsoft.com/office/powerpoint/2010/main" val="580327406"/>
       </p:ext>
     </p:extLst>
   </p:cSld>
